--- a/reports/acdr2026_staff_deployment/進行シナリオ_0929/ACDR2026_進行スライド_Day1_案1007.pptx
+++ b/reports/acdr2026_staff_deployment/進行シナリオ_0929/ACDR2026_進行スライド_Day1_案1007.pptx
@@ -5820,7 +5820,7 @@
         </p:blipFill>
         <p:spPr>
           <a:xfrm>
-            <a:off x="5876474" y="292608"/>
+            <a:off x="5851278" y="292608"/>
             <a:ext cx="835472" cy="566928"/>
           </a:xfrm>
           <a:prstGeom prst="rect">
@@ -5844,7 +5844,7 @@
         </p:blipFill>
         <p:spPr>
           <a:xfrm>
-            <a:off x="6894827" y="292608"/>
+            <a:off x="6869630" y="292608"/>
             <a:ext cx="1598327" cy="566928"/>
           </a:xfrm>
           <a:prstGeom prst="rect">
@@ -5868,7 +5868,7 @@
         </p:blipFill>
         <p:spPr>
           <a:xfrm>
-            <a:off x="8676034" y="292608"/>
+            <a:off x="8650838" y="292608"/>
             <a:ext cx="1285036" cy="566928"/>
           </a:xfrm>
           <a:prstGeom prst="rect">
@@ -5892,8 +5892,8 @@
         </p:blipFill>
         <p:spPr>
           <a:xfrm>
-            <a:off x="10143951" y="292608"/>
-            <a:ext cx="554329" cy="566928"/>
+            <a:off x="10118754" y="292608"/>
+            <a:ext cx="579526" cy="566928"/>
           </a:xfrm>
           <a:prstGeom prst="rect">
             <a:avLst/>
@@ -6256,8 +6256,8 @@
         </p:nvSpPr>
         <p:spPr>
           <a:xfrm>
-            <a:off x="5711882" y="182880"/>
-            <a:ext cx="6202749" cy="786384"/>
+            <a:off x="5686686" y="182880"/>
+            <a:ext cx="6227945" cy="786384"/>
           </a:xfrm>
           <a:prstGeom prst="roundRect">
             <a:avLst>
@@ -6309,7 +6309,7 @@
         </p:blipFill>
         <p:spPr>
           <a:xfrm>
-            <a:off x="5876474" y="292608"/>
+            <a:off x="5851278" y="292608"/>
             <a:ext cx="835472" cy="566928"/>
           </a:xfrm>
           <a:prstGeom prst="rect">
@@ -6333,7 +6333,7 @@
         </p:blipFill>
         <p:spPr>
           <a:xfrm>
-            <a:off x="6894827" y="292608"/>
+            <a:off x="6869630" y="292608"/>
             <a:ext cx="1598327" cy="566928"/>
           </a:xfrm>
           <a:prstGeom prst="rect">
@@ -6357,7 +6357,7 @@
         </p:blipFill>
         <p:spPr>
           <a:xfrm>
-            <a:off x="8676034" y="292608"/>
+            <a:off x="8650838" y="292608"/>
             <a:ext cx="1285036" cy="566928"/>
           </a:xfrm>
           <a:prstGeom prst="rect">
@@ -6381,8 +6381,8 @@
         </p:blipFill>
         <p:spPr>
           <a:xfrm>
-            <a:off x="10143951" y="292608"/>
-            <a:ext cx="554329" cy="566928"/>
+            <a:off x="10118754" y="292608"/>
+            <a:ext cx="579526" cy="566928"/>
           </a:xfrm>
           <a:prstGeom prst="rect">
             <a:avLst/>
@@ -6639,8 +6639,8 @@
         </p:nvSpPr>
         <p:spPr>
           <a:xfrm>
-            <a:off x="5711882" y="182880"/>
-            <a:ext cx="6202749" cy="786384"/>
+            <a:off x="5686686" y="182880"/>
+            <a:ext cx="6227945" cy="786384"/>
           </a:xfrm>
           <a:prstGeom prst="roundRect">
             <a:avLst>
@@ -6692,7 +6692,7 @@
         </p:blipFill>
         <p:spPr>
           <a:xfrm>
-            <a:off x="5876474" y="292608"/>
+            <a:off x="5851278" y="292608"/>
             <a:ext cx="835472" cy="566928"/>
           </a:xfrm>
           <a:prstGeom prst="rect">
@@ -6716,7 +6716,7 @@
         </p:blipFill>
         <p:spPr>
           <a:xfrm>
-            <a:off x="6894827" y="292608"/>
+            <a:off x="6869630" y="292608"/>
             <a:ext cx="1598327" cy="566928"/>
           </a:xfrm>
           <a:prstGeom prst="rect">
@@ -6740,7 +6740,7 @@
         </p:blipFill>
         <p:spPr>
           <a:xfrm>
-            <a:off x="8676034" y="292608"/>
+            <a:off x="8650838" y="292608"/>
             <a:ext cx="1285036" cy="566928"/>
           </a:xfrm>
           <a:prstGeom prst="rect">
@@ -6764,8 +6764,8 @@
         </p:blipFill>
         <p:spPr>
           <a:xfrm>
-            <a:off x="10143951" y="292608"/>
-            <a:ext cx="554329" cy="566928"/>
+            <a:off x="10118754" y="292608"/>
+            <a:ext cx="579526" cy="566928"/>
           </a:xfrm>
           <a:prstGeom prst="rect">
             <a:avLst/>
@@ -7022,8 +7022,8 @@
         </p:nvSpPr>
         <p:spPr>
           <a:xfrm>
-            <a:off x="5711882" y="182880"/>
-            <a:ext cx="6202749" cy="786384"/>
+            <a:off x="5686686" y="182880"/>
+            <a:ext cx="6227945" cy="786384"/>
           </a:xfrm>
           <a:prstGeom prst="roundRect">
             <a:avLst>
@@ -7075,7 +7075,7 @@
         </p:blipFill>
         <p:spPr>
           <a:xfrm>
-            <a:off x="5876474" y="292608"/>
+            <a:off x="5851278" y="292608"/>
             <a:ext cx="835472" cy="566928"/>
           </a:xfrm>
           <a:prstGeom prst="rect">
@@ -7099,7 +7099,7 @@
         </p:blipFill>
         <p:spPr>
           <a:xfrm>
-            <a:off x="6894827" y="292608"/>
+            <a:off x="6869630" y="292608"/>
             <a:ext cx="1598327" cy="566928"/>
           </a:xfrm>
           <a:prstGeom prst="rect">
@@ -7123,7 +7123,7 @@
         </p:blipFill>
         <p:spPr>
           <a:xfrm>
-            <a:off x="8676034" y="292608"/>
+            <a:off x="8650838" y="292608"/>
             <a:ext cx="1285036" cy="566928"/>
           </a:xfrm>
           <a:prstGeom prst="rect">
@@ -7147,8 +7147,8 @@
         </p:blipFill>
         <p:spPr>
           <a:xfrm>
-            <a:off x="10143951" y="292608"/>
-            <a:ext cx="554329" cy="566928"/>
+            <a:off x="10118754" y="292608"/>
+            <a:ext cx="579526" cy="566928"/>
           </a:xfrm>
           <a:prstGeom prst="rect">
             <a:avLst/>
@@ -7405,8 +7405,8 @@
         </p:nvSpPr>
         <p:spPr>
           <a:xfrm>
-            <a:off x="5711882" y="182880"/>
-            <a:ext cx="6202749" cy="786384"/>
+            <a:off x="5686686" y="182880"/>
+            <a:ext cx="6227945" cy="786384"/>
           </a:xfrm>
           <a:prstGeom prst="roundRect">
             <a:avLst>
@@ -7458,7 +7458,7 @@
         </p:blipFill>
         <p:spPr>
           <a:xfrm>
-            <a:off x="5876474" y="292608"/>
+            <a:off x="5851278" y="292608"/>
             <a:ext cx="835472" cy="566928"/>
           </a:xfrm>
           <a:prstGeom prst="rect">
@@ -7482,7 +7482,7 @@
         </p:blipFill>
         <p:spPr>
           <a:xfrm>
-            <a:off x="6894827" y="292608"/>
+            <a:off x="6869630" y="292608"/>
             <a:ext cx="1598327" cy="566928"/>
           </a:xfrm>
           <a:prstGeom prst="rect">
@@ -7506,7 +7506,7 @@
         </p:blipFill>
         <p:spPr>
           <a:xfrm>
-            <a:off x="8676034" y="292608"/>
+            <a:off x="8650838" y="292608"/>
             <a:ext cx="1285036" cy="566928"/>
           </a:xfrm>
           <a:prstGeom prst="rect">
@@ -7530,8 +7530,8 @@
         </p:blipFill>
         <p:spPr>
           <a:xfrm>
-            <a:off x="10143951" y="292608"/>
-            <a:ext cx="554329" cy="566928"/>
+            <a:off x="10118754" y="292608"/>
+            <a:ext cx="579526" cy="566928"/>
           </a:xfrm>
           <a:prstGeom prst="rect">
             <a:avLst/>
@@ -7788,8 +7788,8 @@
         </p:nvSpPr>
         <p:spPr>
           <a:xfrm>
-            <a:off x="5711882" y="182880"/>
-            <a:ext cx="6202749" cy="786384"/>
+            <a:off x="5686686" y="182880"/>
+            <a:ext cx="6227945" cy="786384"/>
           </a:xfrm>
           <a:prstGeom prst="roundRect">
             <a:avLst>
@@ -7841,7 +7841,7 @@
         </p:blipFill>
         <p:spPr>
           <a:xfrm>
-            <a:off x="5876474" y="292608"/>
+            <a:off x="5851278" y="292608"/>
             <a:ext cx="835472" cy="566928"/>
           </a:xfrm>
           <a:prstGeom prst="rect">
@@ -7865,7 +7865,7 @@
         </p:blipFill>
         <p:spPr>
           <a:xfrm>
-            <a:off x="6894827" y="292608"/>
+            <a:off x="6869630" y="292608"/>
             <a:ext cx="1598327" cy="566928"/>
           </a:xfrm>
           <a:prstGeom prst="rect">
@@ -7889,7 +7889,7 @@
         </p:blipFill>
         <p:spPr>
           <a:xfrm>
-            <a:off x="8676034" y="292608"/>
+            <a:off x="8650838" y="292608"/>
             <a:ext cx="1285036" cy="566928"/>
           </a:xfrm>
           <a:prstGeom prst="rect">
@@ -7913,8 +7913,8 @@
         </p:blipFill>
         <p:spPr>
           <a:xfrm>
-            <a:off x="10143951" y="292608"/>
-            <a:ext cx="554329" cy="566928"/>
+            <a:off x="10118754" y="292608"/>
+            <a:ext cx="579526" cy="566928"/>
           </a:xfrm>
           <a:prstGeom prst="rect">
             <a:avLst/>
@@ -8171,8 +8171,8 @@
         </p:nvSpPr>
         <p:spPr>
           <a:xfrm>
-            <a:off x="5711882" y="182880"/>
-            <a:ext cx="6202749" cy="786384"/>
+            <a:off x="5686686" y="182880"/>
+            <a:ext cx="6227945" cy="786384"/>
           </a:xfrm>
           <a:prstGeom prst="roundRect">
             <a:avLst>
@@ -8224,7 +8224,7 @@
         </p:blipFill>
         <p:spPr>
           <a:xfrm>
-            <a:off x="5876474" y="292608"/>
+            <a:off x="5851278" y="292608"/>
             <a:ext cx="835472" cy="566928"/>
           </a:xfrm>
           <a:prstGeom prst="rect">
@@ -8248,7 +8248,7 @@
         </p:blipFill>
         <p:spPr>
           <a:xfrm>
-            <a:off x="6894827" y="292608"/>
+            <a:off x="6869630" y="292608"/>
             <a:ext cx="1598327" cy="566928"/>
           </a:xfrm>
           <a:prstGeom prst="rect">
@@ -8272,7 +8272,7 @@
         </p:blipFill>
         <p:spPr>
           <a:xfrm>
-            <a:off x="8676034" y="292608"/>
+            <a:off x="8650838" y="292608"/>
             <a:ext cx="1285036" cy="566928"/>
           </a:xfrm>
           <a:prstGeom prst="rect">
@@ -8296,8 +8296,8 @@
         </p:blipFill>
         <p:spPr>
           <a:xfrm>
-            <a:off x="10143951" y="292608"/>
-            <a:ext cx="554329" cy="566928"/>
+            <a:off x="10118754" y="292608"/>
+            <a:ext cx="579526" cy="566928"/>
           </a:xfrm>
           <a:prstGeom prst="rect">
             <a:avLst/>
@@ -8554,8 +8554,8 @@
         </p:nvSpPr>
         <p:spPr>
           <a:xfrm>
-            <a:off x="5711882" y="182880"/>
-            <a:ext cx="6202749" cy="786384"/>
+            <a:off x="5686686" y="182880"/>
+            <a:ext cx="6227945" cy="786384"/>
           </a:xfrm>
           <a:prstGeom prst="roundRect">
             <a:avLst>
@@ -8607,7 +8607,7 @@
         </p:blipFill>
         <p:spPr>
           <a:xfrm>
-            <a:off x="5876474" y="292608"/>
+            <a:off x="5851278" y="292608"/>
             <a:ext cx="835472" cy="566928"/>
           </a:xfrm>
           <a:prstGeom prst="rect">
@@ -8631,7 +8631,7 @@
         </p:blipFill>
         <p:spPr>
           <a:xfrm>
-            <a:off x="6894827" y="292608"/>
+            <a:off x="6869630" y="292608"/>
             <a:ext cx="1598327" cy="566928"/>
           </a:xfrm>
           <a:prstGeom prst="rect">
@@ -8655,7 +8655,7 @@
         </p:blipFill>
         <p:spPr>
           <a:xfrm>
-            <a:off x="8676034" y="292608"/>
+            <a:off x="8650838" y="292608"/>
             <a:ext cx="1285036" cy="566928"/>
           </a:xfrm>
           <a:prstGeom prst="rect">
@@ -8679,8 +8679,8 @@
         </p:blipFill>
         <p:spPr>
           <a:xfrm>
-            <a:off x="10143951" y="292608"/>
-            <a:ext cx="554329" cy="566928"/>
+            <a:off x="10118754" y="292608"/>
+            <a:ext cx="579526" cy="566928"/>
           </a:xfrm>
           <a:prstGeom prst="rect">
             <a:avLst/>
@@ -8937,8 +8937,8 @@
         </p:nvSpPr>
         <p:spPr>
           <a:xfrm>
-            <a:off x="5711882" y="182880"/>
-            <a:ext cx="6202749" cy="786384"/>
+            <a:off x="5686686" y="182880"/>
+            <a:ext cx="6227945" cy="786384"/>
           </a:xfrm>
           <a:prstGeom prst="roundRect">
             <a:avLst>
@@ -8990,7 +8990,7 @@
         </p:blipFill>
         <p:spPr>
           <a:xfrm>
-            <a:off x="5876474" y="292608"/>
+            <a:off x="5851278" y="292608"/>
             <a:ext cx="835472" cy="566928"/>
           </a:xfrm>
           <a:prstGeom prst="rect">
@@ -9014,7 +9014,7 @@
         </p:blipFill>
         <p:spPr>
           <a:xfrm>
-            <a:off x="6894827" y="292608"/>
+            <a:off x="6869630" y="292608"/>
             <a:ext cx="1598327" cy="566928"/>
           </a:xfrm>
           <a:prstGeom prst="rect">
@@ -9038,7 +9038,7 @@
         </p:blipFill>
         <p:spPr>
           <a:xfrm>
-            <a:off x="8676034" y="292608"/>
+            <a:off x="8650838" y="292608"/>
             <a:ext cx="1285036" cy="566928"/>
           </a:xfrm>
           <a:prstGeom prst="rect">
@@ -9062,8 +9062,8 @@
         </p:blipFill>
         <p:spPr>
           <a:xfrm>
-            <a:off x="10143951" y="292608"/>
-            <a:ext cx="554329" cy="566928"/>
+            <a:off x="10118754" y="292608"/>
+            <a:ext cx="579526" cy="566928"/>
           </a:xfrm>
           <a:prstGeom prst="rect">
             <a:avLst/>
@@ -9320,8 +9320,8 @@
         </p:nvSpPr>
         <p:spPr>
           <a:xfrm>
-            <a:off x="5711882" y="182880"/>
-            <a:ext cx="6202749" cy="786384"/>
+            <a:off x="5686686" y="182880"/>
+            <a:ext cx="6227945" cy="786384"/>
           </a:xfrm>
           <a:prstGeom prst="roundRect">
             <a:avLst>
@@ -9373,7 +9373,7 @@
         </p:blipFill>
         <p:spPr>
           <a:xfrm>
-            <a:off x="5876474" y="292608"/>
+            <a:off x="5851278" y="292608"/>
             <a:ext cx="835472" cy="566928"/>
           </a:xfrm>
           <a:prstGeom prst="rect">
@@ -9397,7 +9397,7 @@
         </p:blipFill>
         <p:spPr>
           <a:xfrm>
-            <a:off x="6894827" y="292608"/>
+            <a:off x="6869630" y="292608"/>
             <a:ext cx="1598327" cy="566928"/>
           </a:xfrm>
           <a:prstGeom prst="rect">
@@ -9421,7 +9421,7 @@
         </p:blipFill>
         <p:spPr>
           <a:xfrm>
-            <a:off x="8676034" y="292608"/>
+            <a:off x="8650838" y="292608"/>
             <a:ext cx="1285036" cy="566928"/>
           </a:xfrm>
           <a:prstGeom prst="rect">
@@ -9445,8 +9445,8 @@
         </p:blipFill>
         <p:spPr>
           <a:xfrm>
-            <a:off x="10143951" y="292608"/>
-            <a:ext cx="554329" cy="566928"/>
+            <a:off x="10118754" y="292608"/>
+            <a:ext cx="579526" cy="566928"/>
           </a:xfrm>
           <a:prstGeom prst="rect">
             <a:avLst/>
@@ -9762,8 +9762,8 @@
         </p:nvSpPr>
         <p:spPr>
           <a:xfrm>
-            <a:off x="5711882" y="182880"/>
-            <a:ext cx="6202749" cy="786384"/>
+            <a:off x="5686686" y="182880"/>
+            <a:ext cx="6227945" cy="786384"/>
           </a:xfrm>
           <a:prstGeom prst="roundRect">
             <a:avLst>
@@ -9815,7 +9815,7 @@
         </p:blipFill>
         <p:spPr>
           <a:xfrm>
-            <a:off x="5876474" y="292608"/>
+            <a:off x="5851278" y="292608"/>
             <a:ext cx="835472" cy="566928"/>
           </a:xfrm>
           <a:prstGeom prst="rect">
@@ -9839,7 +9839,7 @@
         </p:blipFill>
         <p:spPr>
           <a:xfrm>
-            <a:off x="6894827" y="292608"/>
+            <a:off x="6869630" y="292608"/>
             <a:ext cx="1598327" cy="566928"/>
           </a:xfrm>
           <a:prstGeom prst="rect">
@@ -9863,7 +9863,7 @@
         </p:blipFill>
         <p:spPr>
           <a:xfrm>
-            <a:off x="8676034" y="292608"/>
+            <a:off x="8650838" y="292608"/>
             <a:ext cx="1285036" cy="566928"/>
           </a:xfrm>
           <a:prstGeom prst="rect">
@@ -9887,8 +9887,8 @@
         </p:blipFill>
         <p:spPr>
           <a:xfrm>
-            <a:off x="10143951" y="292608"/>
-            <a:ext cx="554329" cy="566928"/>
+            <a:off x="10118754" y="292608"/>
+            <a:ext cx="579526" cy="566928"/>
           </a:xfrm>
           <a:prstGeom prst="rect">
             <a:avLst/>
@@ -10130,7 +10130,7 @@
         </p:blipFill>
         <p:spPr>
           <a:xfrm>
-            <a:off x="5876474" y="292608"/>
+            <a:off x="5851278" y="292608"/>
             <a:ext cx="835472" cy="566928"/>
           </a:xfrm>
           <a:prstGeom prst="rect">
@@ -10154,7 +10154,7 @@
         </p:blipFill>
         <p:spPr>
           <a:xfrm>
-            <a:off x="6894827" y="292608"/>
+            <a:off x="6869630" y="292608"/>
             <a:ext cx="1598327" cy="566928"/>
           </a:xfrm>
           <a:prstGeom prst="rect">
@@ -10178,7 +10178,7 @@
         </p:blipFill>
         <p:spPr>
           <a:xfrm>
-            <a:off x="8676034" y="292608"/>
+            <a:off x="8650838" y="292608"/>
             <a:ext cx="1285036" cy="566928"/>
           </a:xfrm>
           <a:prstGeom prst="rect">
@@ -10202,8 +10202,8 @@
         </p:blipFill>
         <p:spPr>
           <a:xfrm>
-            <a:off x="10143951" y="292608"/>
-            <a:ext cx="554329" cy="566928"/>
+            <a:off x="10118754" y="292608"/>
+            <a:ext cx="579526" cy="566928"/>
           </a:xfrm>
           <a:prstGeom prst="rect">
             <a:avLst/>
@@ -10554,8 +10554,8 @@
         </p:nvSpPr>
         <p:spPr>
           <a:xfrm>
-            <a:off x="5711882" y="182880"/>
-            <a:ext cx="6202749" cy="786384"/>
+            <a:off x="5686686" y="182880"/>
+            <a:ext cx="6227945" cy="786384"/>
           </a:xfrm>
           <a:prstGeom prst="roundRect">
             <a:avLst>
@@ -10607,7 +10607,7 @@
         </p:blipFill>
         <p:spPr>
           <a:xfrm>
-            <a:off x="5876474" y="292608"/>
+            <a:off x="5851278" y="292608"/>
             <a:ext cx="835472" cy="566928"/>
           </a:xfrm>
           <a:prstGeom prst="rect">
@@ -10631,7 +10631,7 @@
         </p:blipFill>
         <p:spPr>
           <a:xfrm>
-            <a:off x="6894827" y="292608"/>
+            <a:off x="6869630" y="292608"/>
             <a:ext cx="1598327" cy="566928"/>
           </a:xfrm>
           <a:prstGeom prst="rect">
@@ -10655,7 +10655,7 @@
         </p:blipFill>
         <p:spPr>
           <a:xfrm>
-            <a:off x="8676034" y="292608"/>
+            <a:off x="8650838" y="292608"/>
             <a:ext cx="1285036" cy="566928"/>
           </a:xfrm>
           <a:prstGeom prst="rect">
@@ -10679,8 +10679,8 @@
         </p:blipFill>
         <p:spPr>
           <a:xfrm>
-            <a:off x="10143951" y="292608"/>
-            <a:ext cx="554329" cy="566928"/>
+            <a:off x="10118754" y="292608"/>
+            <a:ext cx="579526" cy="566928"/>
           </a:xfrm>
           <a:prstGeom prst="rect">
             <a:avLst/>
@@ -10937,8 +10937,8 @@
         </p:nvSpPr>
         <p:spPr>
           <a:xfrm>
-            <a:off x="5711882" y="182880"/>
-            <a:ext cx="6202749" cy="786384"/>
+            <a:off x="5686686" y="182880"/>
+            <a:ext cx="6227945" cy="786384"/>
           </a:xfrm>
           <a:prstGeom prst="roundRect">
             <a:avLst>
@@ -10990,7 +10990,7 @@
         </p:blipFill>
         <p:spPr>
           <a:xfrm>
-            <a:off x="5876474" y="292608"/>
+            <a:off x="5851278" y="292608"/>
             <a:ext cx="835472" cy="566928"/>
           </a:xfrm>
           <a:prstGeom prst="rect">
@@ -11014,7 +11014,7 @@
         </p:blipFill>
         <p:spPr>
           <a:xfrm>
-            <a:off x="6894827" y="292608"/>
+            <a:off x="6869630" y="292608"/>
             <a:ext cx="1598327" cy="566928"/>
           </a:xfrm>
           <a:prstGeom prst="rect">
@@ -11038,7 +11038,7 @@
         </p:blipFill>
         <p:spPr>
           <a:xfrm>
-            <a:off x="8676034" y="292608"/>
+            <a:off x="8650838" y="292608"/>
             <a:ext cx="1285036" cy="566928"/>
           </a:xfrm>
           <a:prstGeom prst="rect">
@@ -11062,8 +11062,8 @@
         </p:blipFill>
         <p:spPr>
           <a:xfrm>
-            <a:off x="10143951" y="292608"/>
-            <a:ext cx="554329" cy="566928"/>
+            <a:off x="10118754" y="292608"/>
+            <a:ext cx="579526" cy="566928"/>
           </a:xfrm>
           <a:prstGeom prst="rect">
             <a:avLst/>
@@ -11320,8 +11320,8 @@
         </p:nvSpPr>
         <p:spPr>
           <a:xfrm>
-            <a:off x="5711882" y="182880"/>
-            <a:ext cx="6202749" cy="786384"/>
+            <a:off x="5686686" y="182880"/>
+            <a:ext cx="6227945" cy="786384"/>
           </a:xfrm>
           <a:prstGeom prst="roundRect">
             <a:avLst>
@@ -11373,7 +11373,7 @@
         </p:blipFill>
         <p:spPr>
           <a:xfrm>
-            <a:off x="5876474" y="292608"/>
+            <a:off x="5851278" y="292608"/>
             <a:ext cx="835472" cy="566928"/>
           </a:xfrm>
           <a:prstGeom prst="rect">
@@ -11397,7 +11397,7 @@
         </p:blipFill>
         <p:spPr>
           <a:xfrm>
-            <a:off x="6894827" y="292608"/>
+            <a:off x="6869630" y="292608"/>
             <a:ext cx="1598327" cy="566928"/>
           </a:xfrm>
           <a:prstGeom prst="rect">
@@ -11421,7 +11421,7 @@
         </p:blipFill>
         <p:spPr>
           <a:xfrm>
-            <a:off x="8676034" y="292608"/>
+            <a:off x="8650838" y="292608"/>
             <a:ext cx="1285036" cy="566928"/>
           </a:xfrm>
           <a:prstGeom prst="rect">
@@ -11445,8 +11445,8 @@
         </p:blipFill>
         <p:spPr>
           <a:xfrm>
-            <a:off x="10143951" y="292608"/>
-            <a:ext cx="554329" cy="566928"/>
+            <a:off x="10118754" y="292608"/>
+            <a:ext cx="579526" cy="566928"/>
           </a:xfrm>
           <a:prstGeom prst="rect">
             <a:avLst/>
@@ -11703,8 +11703,8 @@
         </p:nvSpPr>
         <p:spPr>
           <a:xfrm>
-            <a:off x="5711882" y="182880"/>
-            <a:ext cx="6202749" cy="786384"/>
+            <a:off x="5686686" y="182880"/>
+            <a:ext cx="6227945" cy="786384"/>
           </a:xfrm>
           <a:prstGeom prst="roundRect">
             <a:avLst>
@@ -11756,7 +11756,7 @@
         </p:blipFill>
         <p:spPr>
           <a:xfrm>
-            <a:off x="5876474" y="292608"/>
+            <a:off x="5851278" y="292608"/>
             <a:ext cx="835472" cy="566928"/>
           </a:xfrm>
           <a:prstGeom prst="rect">
@@ -11780,7 +11780,7 @@
         </p:blipFill>
         <p:spPr>
           <a:xfrm>
-            <a:off x="6894827" y="292608"/>
+            <a:off x="6869630" y="292608"/>
             <a:ext cx="1598327" cy="566928"/>
           </a:xfrm>
           <a:prstGeom prst="rect">
@@ -11804,7 +11804,7 @@
         </p:blipFill>
         <p:spPr>
           <a:xfrm>
-            <a:off x="8676034" y="292608"/>
+            <a:off x="8650838" y="292608"/>
             <a:ext cx="1285036" cy="566928"/>
           </a:xfrm>
           <a:prstGeom prst="rect">
@@ -11828,8 +11828,8 @@
         </p:blipFill>
         <p:spPr>
           <a:xfrm>
-            <a:off x="10143951" y="292608"/>
-            <a:ext cx="554329" cy="566928"/>
+            <a:off x="10118754" y="292608"/>
+            <a:ext cx="579526" cy="566928"/>
           </a:xfrm>
           <a:prstGeom prst="rect">
             <a:avLst/>
@@ -12086,8 +12086,8 @@
         </p:nvSpPr>
         <p:spPr>
           <a:xfrm>
-            <a:off x="5711882" y="182880"/>
-            <a:ext cx="6202749" cy="786384"/>
+            <a:off x="5686686" y="182880"/>
+            <a:ext cx="6227945" cy="786384"/>
           </a:xfrm>
           <a:prstGeom prst="roundRect">
             <a:avLst>
@@ -12139,7 +12139,7 @@
         </p:blipFill>
         <p:spPr>
           <a:xfrm>
-            <a:off x="5876474" y="292608"/>
+            <a:off x="5851278" y="292608"/>
             <a:ext cx="835472" cy="566928"/>
           </a:xfrm>
           <a:prstGeom prst="rect">
@@ -12163,7 +12163,7 @@
         </p:blipFill>
         <p:spPr>
           <a:xfrm>
-            <a:off x="6894827" y="292608"/>
+            <a:off x="6869630" y="292608"/>
             <a:ext cx="1598327" cy="566928"/>
           </a:xfrm>
           <a:prstGeom prst="rect">
@@ -12187,7 +12187,7 @@
         </p:blipFill>
         <p:spPr>
           <a:xfrm>
-            <a:off x="8676034" y="292608"/>
+            <a:off x="8650838" y="292608"/>
             <a:ext cx="1285036" cy="566928"/>
           </a:xfrm>
           <a:prstGeom prst="rect">
@@ -12211,8 +12211,8 @@
         </p:blipFill>
         <p:spPr>
           <a:xfrm>
-            <a:off x="10143951" y="292608"/>
-            <a:ext cx="554329" cy="566928"/>
+            <a:off x="10118754" y="292608"/>
+            <a:ext cx="579526" cy="566928"/>
           </a:xfrm>
           <a:prstGeom prst="rect">
             <a:avLst/>
@@ -12469,8 +12469,8 @@
         </p:nvSpPr>
         <p:spPr>
           <a:xfrm>
-            <a:off x="5711882" y="182880"/>
-            <a:ext cx="6202749" cy="786384"/>
+            <a:off x="5686686" y="182880"/>
+            <a:ext cx="6227945" cy="786384"/>
           </a:xfrm>
           <a:prstGeom prst="roundRect">
             <a:avLst>
@@ -12522,7 +12522,7 @@
         </p:blipFill>
         <p:spPr>
           <a:xfrm>
-            <a:off x="5876474" y="292608"/>
+            <a:off x="5851278" y="292608"/>
             <a:ext cx="835472" cy="566928"/>
           </a:xfrm>
           <a:prstGeom prst="rect">
@@ -12546,7 +12546,7 @@
         </p:blipFill>
         <p:spPr>
           <a:xfrm>
-            <a:off x="6894827" y="292608"/>
+            <a:off x="6869630" y="292608"/>
             <a:ext cx="1598327" cy="566928"/>
           </a:xfrm>
           <a:prstGeom prst="rect">
@@ -12570,7 +12570,7 @@
         </p:blipFill>
         <p:spPr>
           <a:xfrm>
-            <a:off x="8676034" y="292608"/>
+            <a:off x="8650838" y="292608"/>
             <a:ext cx="1285036" cy="566928"/>
           </a:xfrm>
           <a:prstGeom prst="rect">
@@ -12594,8 +12594,8 @@
         </p:blipFill>
         <p:spPr>
           <a:xfrm>
-            <a:off x="10143951" y="292608"/>
-            <a:ext cx="554329" cy="566928"/>
+            <a:off x="10118754" y="292608"/>
+            <a:ext cx="579526" cy="566928"/>
           </a:xfrm>
           <a:prstGeom prst="rect">
             <a:avLst/>
@@ -12852,8 +12852,8 @@
         </p:nvSpPr>
         <p:spPr>
           <a:xfrm>
-            <a:off x="5711882" y="182880"/>
-            <a:ext cx="6202749" cy="786384"/>
+            <a:off x="5686686" y="182880"/>
+            <a:ext cx="6227945" cy="786384"/>
           </a:xfrm>
           <a:prstGeom prst="roundRect">
             <a:avLst>
@@ -12905,7 +12905,7 @@
         </p:blipFill>
         <p:spPr>
           <a:xfrm>
-            <a:off x="5876474" y="292608"/>
+            <a:off x="5851278" y="292608"/>
             <a:ext cx="835472" cy="566928"/>
           </a:xfrm>
           <a:prstGeom prst="rect">
@@ -12929,7 +12929,7 @@
         </p:blipFill>
         <p:spPr>
           <a:xfrm>
-            <a:off x="6894827" y="292608"/>
+            <a:off x="6869630" y="292608"/>
             <a:ext cx="1598327" cy="566928"/>
           </a:xfrm>
           <a:prstGeom prst="rect">
@@ -12953,7 +12953,7 @@
         </p:blipFill>
         <p:spPr>
           <a:xfrm>
-            <a:off x="8676034" y="292608"/>
+            <a:off x="8650838" y="292608"/>
             <a:ext cx="1285036" cy="566928"/>
           </a:xfrm>
           <a:prstGeom prst="rect">
@@ -12977,8 +12977,8 @@
         </p:blipFill>
         <p:spPr>
           <a:xfrm>
-            <a:off x="10143951" y="292608"/>
-            <a:ext cx="554329" cy="566928"/>
+            <a:off x="10118754" y="292608"/>
+            <a:ext cx="579526" cy="566928"/>
           </a:xfrm>
           <a:prstGeom prst="rect">
             <a:avLst/>
@@ -13235,8 +13235,8 @@
         </p:nvSpPr>
         <p:spPr>
           <a:xfrm>
-            <a:off x="5711882" y="182880"/>
-            <a:ext cx="6202749" cy="786384"/>
+            <a:off x="5686686" y="182880"/>
+            <a:ext cx="6227945" cy="786384"/>
           </a:xfrm>
           <a:prstGeom prst="roundRect">
             <a:avLst>
@@ -13288,7 +13288,7 @@
         </p:blipFill>
         <p:spPr>
           <a:xfrm>
-            <a:off x="5876474" y="292608"/>
+            <a:off x="5851278" y="292608"/>
             <a:ext cx="835472" cy="566928"/>
           </a:xfrm>
           <a:prstGeom prst="rect">
@@ -13312,7 +13312,7 @@
         </p:blipFill>
         <p:spPr>
           <a:xfrm>
-            <a:off x="6894827" y="292608"/>
+            <a:off x="6869630" y="292608"/>
             <a:ext cx="1598327" cy="566928"/>
           </a:xfrm>
           <a:prstGeom prst="rect">
@@ -13336,7 +13336,7 @@
         </p:blipFill>
         <p:spPr>
           <a:xfrm>
-            <a:off x="8676034" y="292608"/>
+            <a:off x="8650838" y="292608"/>
             <a:ext cx="1285036" cy="566928"/>
           </a:xfrm>
           <a:prstGeom prst="rect">
@@ -13360,8 +13360,8 @@
         </p:blipFill>
         <p:spPr>
           <a:xfrm>
-            <a:off x="10143951" y="292608"/>
-            <a:ext cx="554329" cy="566928"/>
+            <a:off x="10118754" y="292608"/>
+            <a:ext cx="579526" cy="566928"/>
           </a:xfrm>
           <a:prstGeom prst="rect">
             <a:avLst/>
@@ -13618,8 +13618,8 @@
         </p:nvSpPr>
         <p:spPr>
           <a:xfrm>
-            <a:off x="5711882" y="182880"/>
-            <a:ext cx="6202749" cy="786384"/>
+            <a:off x="5686686" y="182880"/>
+            <a:ext cx="6227945" cy="786384"/>
           </a:xfrm>
           <a:prstGeom prst="roundRect">
             <a:avLst>
@@ -13671,7 +13671,7 @@
         </p:blipFill>
         <p:spPr>
           <a:xfrm>
-            <a:off x="5876474" y="292608"/>
+            <a:off x="5851278" y="292608"/>
             <a:ext cx="835472" cy="566928"/>
           </a:xfrm>
           <a:prstGeom prst="rect">
@@ -13695,7 +13695,7 @@
         </p:blipFill>
         <p:spPr>
           <a:xfrm>
-            <a:off x="6894827" y="292608"/>
+            <a:off x="6869630" y="292608"/>
             <a:ext cx="1598327" cy="566928"/>
           </a:xfrm>
           <a:prstGeom prst="rect">
@@ -13719,7 +13719,7 @@
         </p:blipFill>
         <p:spPr>
           <a:xfrm>
-            <a:off x="8676034" y="292608"/>
+            <a:off x="8650838" y="292608"/>
             <a:ext cx="1285036" cy="566928"/>
           </a:xfrm>
           <a:prstGeom prst="rect">
@@ -13743,8 +13743,8 @@
         </p:blipFill>
         <p:spPr>
           <a:xfrm>
-            <a:off x="10143951" y="292608"/>
-            <a:ext cx="554329" cy="566928"/>
+            <a:off x="10118754" y="292608"/>
+            <a:ext cx="579526" cy="566928"/>
           </a:xfrm>
           <a:prstGeom prst="rect">
             <a:avLst/>
@@ -14001,8 +14001,8 @@
         </p:nvSpPr>
         <p:spPr>
           <a:xfrm>
-            <a:off x="5711882" y="182880"/>
-            <a:ext cx="6202749" cy="786384"/>
+            <a:off x="5686686" y="182880"/>
+            <a:ext cx="6227945" cy="786384"/>
           </a:xfrm>
           <a:prstGeom prst="roundRect">
             <a:avLst>
@@ -14054,7 +14054,7 @@
         </p:blipFill>
         <p:spPr>
           <a:xfrm>
-            <a:off x="5876474" y="292608"/>
+            <a:off x="5851278" y="292608"/>
             <a:ext cx="835472" cy="566928"/>
           </a:xfrm>
           <a:prstGeom prst="rect">
@@ -14078,7 +14078,7 @@
         </p:blipFill>
         <p:spPr>
           <a:xfrm>
-            <a:off x="6894827" y="292608"/>
+            <a:off x="6869630" y="292608"/>
             <a:ext cx="1598327" cy="566928"/>
           </a:xfrm>
           <a:prstGeom prst="rect">
@@ -14102,7 +14102,7 @@
         </p:blipFill>
         <p:spPr>
           <a:xfrm>
-            <a:off x="8676034" y="292608"/>
+            <a:off x="8650838" y="292608"/>
             <a:ext cx="1285036" cy="566928"/>
           </a:xfrm>
           <a:prstGeom prst="rect">
@@ -14126,8 +14126,8 @@
         </p:blipFill>
         <p:spPr>
           <a:xfrm>
-            <a:off x="10143951" y="292608"/>
-            <a:ext cx="554329" cy="566928"/>
+            <a:off x="10118754" y="292608"/>
+            <a:ext cx="579526" cy="566928"/>
           </a:xfrm>
           <a:prstGeom prst="rect">
             <a:avLst/>
@@ -14384,8 +14384,8 @@
         </p:nvSpPr>
         <p:spPr>
           <a:xfrm>
-            <a:off x="5711882" y="182880"/>
-            <a:ext cx="6202749" cy="786384"/>
+            <a:off x="5686686" y="182880"/>
+            <a:ext cx="6227945" cy="786384"/>
           </a:xfrm>
           <a:prstGeom prst="roundRect">
             <a:avLst>
@@ -14437,7 +14437,7 @@
         </p:blipFill>
         <p:spPr>
           <a:xfrm>
-            <a:off x="5876474" y="292608"/>
+            <a:off x="5851278" y="292608"/>
             <a:ext cx="835472" cy="566928"/>
           </a:xfrm>
           <a:prstGeom prst="rect">
@@ -14461,7 +14461,7 @@
         </p:blipFill>
         <p:spPr>
           <a:xfrm>
-            <a:off x="6894827" y="292608"/>
+            <a:off x="6869630" y="292608"/>
             <a:ext cx="1598327" cy="566928"/>
           </a:xfrm>
           <a:prstGeom prst="rect">
@@ -14485,7 +14485,7 @@
         </p:blipFill>
         <p:spPr>
           <a:xfrm>
-            <a:off x="8676034" y="292608"/>
+            <a:off x="8650838" y="292608"/>
             <a:ext cx="1285036" cy="566928"/>
           </a:xfrm>
           <a:prstGeom prst="rect">
@@ -14509,8 +14509,8 @@
         </p:blipFill>
         <p:spPr>
           <a:xfrm>
-            <a:off x="10143951" y="292608"/>
-            <a:ext cx="554329" cy="566928"/>
+            <a:off x="10118754" y="292608"/>
+            <a:ext cx="579526" cy="566928"/>
           </a:xfrm>
           <a:prstGeom prst="rect">
             <a:avLst/>
@@ -14928,8 +14928,8 @@
         </p:nvSpPr>
         <p:spPr>
           <a:xfrm>
-            <a:off x="5711882" y="182880"/>
-            <a:ext cx="6202749" cy="786384"/>
+            <a:off x="5686686" y="182880"/>
+            <a:ext cx="6227945" cy="786384"/>
           </a:xfrm>
           <a:prstGeom prst="roundRect">
             <a:avLst>
@@ -14981,7 +14981,7 @@
         </p:blipFill>
         <p:spPr>
           <a:xfrm>
-            <a:off x="5876474" y="292608"/>
+            <a:off x="5851278" y="292608"/>
             <a:ext cx="835472" cy="566928"/>
           </a:xfrm>
           <a:prstGeom prst="rect">
@@ -15005,7 +15005,7 @@
         </p:blipFill>
         <p:spPr>
           <a:xfrm>
-            <a:off x="6894827" y="292608"/>
+            <a:off x="6869630" y="292608"/>
             <a:ext cx="1598327" cy="566928"/>
           </a:xfrm>
           <a:prstGeom prst="rect">
@@ -15029,7 +15029,7 @@
         </p:blipFill>
         <p:spPr>
           <a:xfrm>
-            <a:off x="8676034" y="292608"/>
+            <a:off x="8650838" y="292608"/>
             <a:ext cx="1285036" cy="566928"/>
           </a:xfrm>
           <a:prstGeom prst="rect">
@@ -15053,8 +15053,8 @@
         </p:blipFill>
         <p:spPr>
           <a:xfrm>
-            <a:off x="10143951" y="292608"/>
-            <a:ext cx="554329" cy="566928"/>
+            <a:off x="10118754" y="292608"/>
+            <a:ext cx="579526" cy="566928"/>
           </a:xfrm>
           <a:prstGeom prst="rect">
             <a:avLst/>
@@ -15311,8 +15311,8 @@
         </p:nvSpPr>
         <p:spPr>
           <a:xfrm>
-            <a:off x="5711882" y="182880"/>
-            <a:ext cx="6202749" cy="786384"/>
+            <a:off x="5686686" y="182880"/>
+            <a:ext cx="6227945" cy="786384"/>
           </a:xfrm>
           <a:prstGeom prst="roundRect">
             <a:avLst>
@@ -15364,7 +15364,7 @@
         </p:blipFill>
         <p:spPr>
           <a:xfrm>
-            <a:off x="5876474" y="292608"/>
+            <a:off x="5851278" y="292608"/>
             <a:ext cx="835472" cy="566928"/>
           </a:xfrm>
           <a:prstGeom prst="rect">
@@ -15388,7 +15388,7 @@
         </p:blipFill>
         <p:spPr>
           <a:xfrm>
-            <a:off x="6894827" y="292608"/>
+            <a:off x="6869630" y="292608"/>
             <a:ext cx="1598327" cy="566928"/>
           </a:xfrm>
           <a:prstGeom prst="rect">
@@ -15412,7 +15412,7 @@
         </p:blipFill>
         <p:spPr>
           <a:xfrm>
-            <a:off x="8676034" y="292608"/>
+            <a:off x="8650838" y="292608"/>
             <a:ext cx="1285036" cy="566928"/>
           </a:xfrm>
           <a:prstGeom prst="rect">
@@ -15436,8 +15436,8 @@
         </p:blipFill>
         <p:spPr>
           <a:xfrm>
-            <a:off x="10143951" y="292608"/>
-            <a:ext cx="554329" cy="566928"/>
+            <a:off x="10118754" y="292608"/>
+            <a:ext cx="579526" cy="566928"/>
           </a:xfrm>
           <a:prstGeom prst="rect">
             <a:avLst/>
@@ -15738,8 +15738,8 @@
         </p:nvSpPr>
         <p:spPr>
           <a:xfrm>
-            <a:off x="5711882" y="182880"/>
-            <a:ext cx="6202749" cy="786384"/>
+            <a:off x="5686686" y="182880"/>
+            <a:ext cx="6227945" cy="786384"/>
           </a:xfrm>
           <a:prstGeom prst="roundRect">
             <a:avLst>
@@ -15791,7 +15791,7 @@
         </p:blipFill>
         <p:spPr>
           <a:xfrm>
-            <a:off x="5876474" y="292608"/>
+            <a:off x="5851278" y="292608"/>
             <a:ext cx="835472" cy="566928"/>
           </a:xfrm>
           <a:prstGeom prst="rect">
@@ -15815,7 +15815,7 @@
         </p:blipFill>
         <p:spPr>
           <a:xfrm>
-            <a:off x="6894827" y="292608"/>
+            <a:off x="6869630" y="292608"/>
             <a:ext cx="1598327" cy="566928"/>
           </a:xfrm>
           <a:prstGeom prst="rect">
@@ -15839,7 +15839,7 @@
         </p:blipFill>
         <p:spPr>
           <a:xfrm>
-            <a:off x="8676034" y="292608"/>
+            <a:off x="8650838" y="292608"/>
             <a:ext cx="1285036" cy="566928"/>
           </a:xfrm>
           <a:prstGeom prst="rect">
@@ -15863,8 +15863,8 @@
         </p:blipFill>
         <p:spPr>
           <a:xfrm>
-            <a:off x="10143951" y="292608"/>
-            <a:ext cx="554329" cy="566928"/>
+            <a:off x="10118754" y="292608"/>
+            <a:ext cx="579526" cy="566928"/>
           </a:xfrm>
           <a:prstGeom prst="rect">
             <a:avLst/>
@@ -16177,8 +16177,8 @@
         </p:nvSpPr>
         <p:spPr>
           <a:xfrm>
-            <a:off x="5711882" y="182880"/>
-            <a:ext cx="6202749" cy="786384"/>
+            <a:off x="5686686" y="182880"/>
+            <a:ext cx="6227945" cy="786384"/>
           </a:xfrm>
           <a:prstGeom prst="roundRect">
             <a:avLst>
@@ -16230,7 +16230,7 @@
         </p:blipFill>
         <p:spPr>
           <a:xfrm>
-            <a:off x="5876474" y="292608"/>
+            <a:off x="5851278" y="292608"/>
             <a:ext cx="835472" cy="566928"/>
           </a:xfrm>
           <a:prstGeom prst="rect">
@@ -16254,7 +16254,7 @@
         </p:blipFill>
         <p:spPr>
           <a:xfrm>
-            <a:off x="6894827" y="292608"/>
+            <a:off x="6869630" y="292608"/>
             <a:ext cx="1598327" cy="566928"/>
           </a:xfrm>
           <a:prstGeom prst="rect">
@@ -16278,7 +16278,7 @@
         </p:blipFill>
         <p:spPr>
           <a:xfrm>
-            <a:off x="8676034" y="292608"/>
+            <a:off x="8650838" y="292608"/>
             <a:ext cx="1285036" cy="566928"/>
           </a:xfrm>
           <a:prstGeom prst="rect">
@@ -16302,8 +16302,8 @@
         </p:blipFill>
         <p:spPr>
           <a:xfrm>
-            <a:off x="10143951" y="292608"/>
-            <a:ext cx="554329" cy="566928"/>
+            <a:off x="10118754" y="292608"/>
+            <a:ext cx="579526" cy="566928"/>
           </a:xfrm>
           <a:prstGeom prst="rect">
             <a:avLst/>
@@ -16548,8 +16548,8 @@
         </p:nvSpPr>
         <p:spPr>
           <a:xfrm>
-            <a:off x="5711882" y="182880"/>
-            <a:ext cx="6202749" cy="786384"/>
+            <a:off x="5686686" y="182880"/>
+            <a:ext cx="6227945" cy="786384"/>
           </a:xfrm>
           <a:prstGeom prst="roundRect">
             <a:avLst>
@@ -16601,7 +16601,7 @@
         </p:blipFill>
         <p:spPr>
           <a:xfrm>
-            <a:off x="5876474" y="292608"/>
+            <a:off x="5851278" y="292608"/>
             <a:ext cx="835472" cy="566928"/>
           </a:xfrm>
           <a:prstGeom prst="rect">
@@ -16625,7 +16625,7 @@
         </p:blipFill>
         <p:spPr>
           <a:xfrm>
-            <a:off x="6894827" y="292608"/>
+            <a:off x="6869630" y="292608"/>
             <a:ext cx="1598327" cy="566928"/>
           </a:xfrm>
           <a:prstGeom prst="rect">
@@ -16649,7 +16649,7 @@
         </p:blipFill>
         <p:spPr>
           <a:xfrm>
-            <a:off x="8676034" y="292608"/>
+            <a:off x="8650838" y="292608"/>
             <a:ext cx="1285036" cy="566928"/>
           </a:xfrm>
           <a:prstGeom prst="rect">
@@ -16673,8 +16673,8 @@
         </p:blipFill>
         <p:spPr>
           <a:xfrm>
-            <a:off x="10143951" y="292608"/>
-            <a:ext cx="554329" cy="566928"/>
+            <a:off x="10118754" y="292608"/>
+            <a:ext cx="579526" cy="566928"/>
           </a:xfrm>
           <a:prstGeom prst="rect">
             <a:avLst/>
@@ -16919,8 +16919,8 @@
         </p:nvSpPr>
         <p:spPr>
           <a:xfrm>
-            <a:off x="5711882" y="182880"/>
-            <a:ext cx="6202749" cy="786384"/>
+            <a:off x="5686686" y="182880"/>
+            <a:ext cx="6227945" cy="786384"/>
           </a:xfrm>
           <a:prstGeom prst="roundRect">
             <a:avLst>
@@ -16972,7 +16972,7 @@
         </p:blipFill>
         <p:spPr>
           <a:xfrm>
-            <a:off x="5876474" y="292608"/>
+            <a:off x="5851278" y="292608"/>
             <a:ext cx="835472" cy="566928"/>
           </a:xfrm>
           <a:prstGeom prst="rect">
@@ -16996,7 +16996,7 @@
         </p:blipFill>
         <p:spPr>
           <a:xfrm>
-            <a:off x="6894827" y="292608"/>
+            <a:off x="6869630" y="292608"/>
             <a:ext cx="1598327" cy="566928"/>
           </a:xfrm>
           <a:prstGeom prst="rect">
@@ -17020,7 +17020,7 @@
         </p:blipFill>
         <p:spPr>
           <a:xfrm>
-            <a:off x="8676034" y="292608"/>
+            <a:off x="8650838" y="292608"/>
             <a:ext cx="1285036" cy="566928"/>
           </a:xfrm>
           <a:prstGeom prst="rect">
@@ -17044,8 +17044,8 @@
         </p:blipFill>
         <p:spPr>
           <a:xfrm>
-            <a:off x="10143951" y="292608"/>
-            <a:ext cx="554329" cy="566928"/>
+            <a:off x="10118754" y="292608"/>
+            <a:ext cx="579526" cy="566928"/>
           </a:xfrm>
           <a:prstGeom prst="rect">
             <a:avLst/>
@@ -17325,8 +17325,8 @@
         </p:nvSpPr>
         <p:spPr>
           <a:xfrm>
-            <a:off x="5711882" y="182880"/>
-            <a:ext cx="6202749" cy="786384"/>
+            <a:off x="5686686" y="182880"/>
+            <a:ext cx="6227945" cy="786384"/>
           </a:xfrm>
           <a:prstGeom prst="roundRect">
             <a:avLst>
@@ -17378,7 +17378,7 @@
         </p:blipFill>
         <p:spPr>
           <a:xfrm>
-            <a:off x="5876474" y="292608"/>
+            <a:off x="5851278" y="292608"/>
             <a:ext cx="835472" cy="566928"/>
           </a:xfrm>
           <a:prstGeom prst="rect">
@@ -17402,7 +17402,7 @@
         </p:blipFill>
         <p:spPr>
           <a:xfrm>
-            <a:off x="6894827" y="292608"/>
+            <a:off x="6869630" y="292608"/>
             <a:ext cx="1598327" cy="566928"/>
           </a:xfrm>
           <a:prstGeom prst="rect">
@@ -17426,7 +17426,7 @@
         </p:blipFill>
         <p:spPr>
           <a:xfrm>
-            <a:off x="8676034" y="292608"/>
+            <a:off x="8650838" y="292608"/>
             <a:ext cx="1285036" cy="566928"/>
           </a:xfrm>
           <a:prstGeom prst="rect">
@@ -17450,8 +17450,8 @@
         </p:blipFill>
         <p:spPr>
           <a:xfrm>
-            <a:off x="10143951" y="292608"/>
-            <a:ext cx="554329" cy="566928"/>
+            <a:off x="10118754" y="292608"/>
+            <a:ext cx="579526" cy="566928"/>
           </a:xfrm>
           <a:prstGeom prst="rect">
             <a:avLst/>
@@ -17731,8 +17731,8 @@
         </p:nvSpPr>
         <p:spPr>
           <a:xfrm>
-            <a:off x="5711882" y="182880"/>
-            <a:ext cx="6202749" cy="786384"/>
+            <a:off x="5686686" y="182880"/>
+            <a:ext cx="6227945" cy="786384"/>
           </a:xfrm>
           <a:prstGeom prst="roundRect">
             <a:avLst>
@@ -17784,7 +17784,7 @@
         </p:blipFill>
         <p:spPr>
           <a:xfrm>
-            <a:off x="5876474" y="292608"/>
+            <a:off x="5851278" y="292608"/>
             <a:ext cx="835472" cy="566928"/>
           </a:xfrm>
           <a:prstGeom prst="rect">
@@ -17808,7 +17808,7 @@
         </p:blipFill>
         <p:spPr>
           <a:xfrm>
-            <a:off x="6894827" y="292608"/>
+            <a:off x="6869630" y="292608"/>
             <a:ext cx="1598327" cy="566928"/>
           </a:xfrm>
           <a:prstGeom prst="rect">
@@ -17832,7 +17832,7 @@
         </p:blipFill>
         <p:spPr>
           <a:xfrm>
-            <a:off x="8676034" y="292608"/>
+            <a:off x="8650838" y="292608"/>
             <a:ext cx="1285036" cy="566928"/>
           </a:xfrm>
           <a:prstGeom prst="rect">
@@ -17856,8 +17856,8 @@
         </p:blipFill>
         <p:spPr>
           <a:xfrm>
-            <a:off x="10143951" y="292608"/>
-            <a:ext cx="554329" cy="566928"/>
+            <a:off x="10118754" y="292608"/>
+            <a:ext cx="579526" cy="566928"/>
           </a:xfrm>
           <a:prstGeom prst="rect">
             <a:avLst/>
@@ -18137,8 +18137,8 @@
         </p:nvSpPr>
         <p:spPr>
           <a:xfrm>
-            <a:off x="5711882" y="182880"/>
-            <a:ext cx="6202749" cy="786384"/>
+            <a:off x="5686686" y="182880"/>
+            <a:ext cx="6227945" cy="786384"/>
           </a:xfrm>
           <a:prstGeom prst="roundRect">
             <a:avLst>
@@ -18190,7 +18190,7 @@
         </p:blipFill>
         <p:spPr>
           <a:xfrm>
-            <a:off x="5876474" y="292608"/>
+            <a:off x="5851278" y="292608"/>
             <a:ext cx="835472" cy="566928"/>
           </a:xfrm>
           <a:prstGeom prst="rect">
@@ -18214,7 +18214,7 @@
         </p:blipFill>
         <p:spPr>
           <a:xfrm>
-            <a:off x="6894827" y="292608"/>
+            <a:off x="6869630" y="292608"/>
             <a:ext cx="1598327" cy="566928"/>
           </a:xfrm>
           <a:prstGeom prst="rect">
@@ -18238,7 +18238,7 @@
         </p:blipFill>
         <p:spPr>
           <a:xfrm>
-            <a:off x="8676034" y="292608"/>
+            <a:off x="8650838" y="292608"/>
             <a:ext cx="1285036" cy="566928"/>
           </a:xfrm>
           <a:prstGeom prst="rect">
@@ -18262,8 +18262,8 @@
         </p:blipFill>
         <p:spPr>
           <a:xfrm>
-            <a:off x="10143951" y="292608"/>
-            <a:ext cx="554329" cy="566928"/>
+            <a:off x="10118754" y="292608"/>
+            <a:ext cx="579526" cy="566928"/>
           </a:xfrm>
           <a:prstGeom prst="rect">
             <a:avLst/>
@@ -18508,8 +18508,8 @@
         </p:nvSpPr>
         <p:spPr>
           <a:xfrm>
-            <a:off x="5711882" y="182880"/>
-            <a:ext cx="6202749" cy="786384"/>
+            <a:off x="5686686" y="182880"/>
+            <a:ext cx="6227945" cy="786384"/>
           </a:xfrm>
           <a:prstGeom prst="roundRect">
             <a:avLst>
@@ -18561,7 +18561,7 @@
         </p:blipFill>
         <p:spPr>
           <a:xfrm>
-            <a:off x="5876474" y="292608"/>
+            <a:off x="5851278" y="292608"/>
             <a:ext cx="835472" cy="566928"/>
           </a:xfrm>
           <a:prstGeom prst="rect">
@@ -18585,7 +18585,7 @@
         </p:blipFill>
         <p:spPr>
           <a:xfrm>
-            <a:off x="6894827" y="292608"/>
+            <a:off x="6869630" y="292608"/>
             <a:ext cx="1598327" cy="566928"/>
           </a:xfrm>
           <a:prstGeom prst="rect">
@@ -18609,7 +18609,7 @@
         </p:blipFill>
         <p:spPr>
           <a:xfrm>
-            <a:off x="8676034" y="292608"/>
+            <a:off x="8650838" y="292608"/>
             <a:ext cx="1285036" cy="566928"/>
           </a:xfrm>
           <a:prstGeom prst="rect">
@@ -18633,8 +18633,8 @@
         </p:blipFill>
         <p:spPr>
           <a:xfrm>
-            <a:off x="10143951" y="292608"/>
-            <a:ext cx="554329" cy="566928"/>
+            <a:off x="10118754" y="292608"/>
+            <a:ext cx="579526" cy="566928"/>
           </a:xfrm>
           <a:prstGeom prst="rect">
             <a:avLst/>

--- a/reports/acdr2026_staff_deployment/進行シナリオ_0929/ACDR2026_進行スライド_Day1_案1007.pptx
+++ b/reports/acdr2026_staff_deployment/進行シナリオ_0929/ACDR2026_進行スライド_Day1_案1007.pptx
@@ -5804,9 +5804,54 @@
           </a:prstGeom>
         </p:spPr>
       </p:pic>
-      <p:pic>
-        <p:nvPicPr>
-          <p:cNvPr id="3" name="Logo_sg" descr="sg.png"/>
+      <p:sp>
+        <p:nvSpPr>
+          <p:cNvPr id="3" name="LogoStrip"/>
+          <p:cNvSpPr/>
+          <p:nvPr/>
+        </p:nvSpPr>
+        <p:spPr>
+          <a:xfrm>
+            <a:off x="5829346" y="182880"/>
+            <a:ext cx="6085285" cy="786384"/>
+          </a:xfrm>
+          <a:prstGeom prst="roundRect">
+            <a:avLst>
+              <a:gd name="adj" fmla="val 18000"/>
+            </a:avLst>
+          </a:prstGeom>
+          <a:solidFill>
+            <a:srgbClr val="FFFFFF"/>
+          </a:solidFill>
+          <a:ln>
+            <a:noFill/>
+          </a:ln>
+        </p:spPr>
+        <p:style>
+          <a:lnRef idx="1">
+            <a:schemeClr val="accent1"/>
+          </a:lnRef>
+          <a:fillRef idx="3">
+            <a:schemeClr val="accent1"/>
+          </a:fillRef>
+          <a:effectRef idx="2">
+            <a:schemeClr val="accent1"/>
+          </a:effectRef>
+          <a:fontRef idx="minor">
+            <a:schemeClr val="lt1"/>
+          </a:fontRef>
+        </p:style>
+        <p:txBody>
+          <a:bodyPr rtlCol="0" anchor="ctr"/>
+          <a:lstStyle/>
+          <a:p>
+            <a:pPr algn="ctr"/>
+          </a:p>
+        </p:txBody>
+      </p:sp>
+      <p:pic>
+        <p:nvPicPr>
+          <p:cNvPr id="4" name="Logo_sg" descr="sg.png"/>
           <p:cNvPicPr>
             <a:picLocks noChangeAspect="1"/>
           </p:cNvPicPr>
@@ -5820,7 +5865,7 @@
         </p:blipFill>
         <p:spPr>
           <a:xfrm>
-            <a:off x="5851278" y="292608"/>
+            <a:off x="5993938" y="292608"/>
             <a:ext cx="835472" cy="566928"/>
           </a:xfrm>
           <a:prstGeom prst="rect">
@@ -5830,7 +5875,7 @@
       </p:pic>
       <p:pic>
         <p:nvPicPr>
-          <p:cNvPr id="4" name="Logo_scdf" descr="scdf.png"/>
+          <p:cNvPr id="5" name="Logo_scdf" descr="scdf.png"/>
           <p:cNvPicPr>
             <a:picLocks noChangeAspect="1"/>
           </p:cNvPicPr>
@@ -5844,17 +5889,17 @@
         </p:blipFill>
         <p:spPr>
           <a:xfrm>
-            <a:off x="6869630" y="292608"/>
-            <a:ext cx="1598327" cy="566928"/>
-          </a:xfrm>
-          <a:prstGeom prst="rect">
-            <a:avLst/>
-          </a:prstGeom>
-        </p:spPr>
-      </p:pic>
-      <p:pic>
-        <p:nvPicPr>
-          <p:cNvPr id="5" name="Logo_cosem" descr="cosem.png"/>
+            <a:off x="7012291" y="292608"/>
+            <a:ext cx="1646830" cy="566928"/>
+          </a:xfrm>
+          <a:prstGeom prst="rect">
+            <a:avLst/>
+          </a:prstGeom>
+        </p:spPr>
+      </p:pic>
+      <p:pic>
+        <p:nvPicPr>
+          <p:cNvPr id="6" name="Logo_cosem" descr="cosem.png"/>
           <p:cNvPicPr>
             <a:picLocks noChangeAspect="1"/>
           </p:cNvPicPr>
@@ -5868,17 +5913,17 @@
         </p:blipFill>
         <p:spPr>
           <a:xfrm>
-            <a:off x="8650838" y="292608"/>
-            <a:ext cx="1285036" cy="566928"/>
-          </a:xfrm>
-          <a:prstGeom prst="rect">
-            <a:avLst/>
-          </a:prstGeom>
-        </p:spPr>
-      </p:pic>
-      <p:pic>
-        <p:nvPicPr>
-          <p:cNvPr id="6" name="Logo_adrc" descr="adrc.png"/>
+            <a:off x="8842002" y="292608"/>
+            <a:ext cx="1093872" cy="566928"/>
+          </a:xfrm>
+          <a:prstGeom prst="rect">
+            <a:avLst/>
+          </a:prstGeom>
+        </p:spPr>
+      </p:pic>
+      <p:pic>
+        <p:nvPicPr>
+          <p:cNvPr id="7" name="Logo_adrc" descr="adrc.png"/>
           <p:cNvPicPr>
             <a:picLocks noChangeAspect="1"/>
           </p:cNvPicPr>
@@ -5902,7 +5947,7 @@
       </p:pic>
       <p:pic>
         <p:nvPicPr>
-          <p:cNvPr id="7" name="Logo_jp" descr="jp.png"/>
+          <p:cNvPr id="8" name="Logo_jp" descr="jp.png"/>
           <p:cNvPicPr>
             <a:picLocks noChangeAspect="1"/>
           </p:cNvPicPr>
@@ -5926,7 +5971,7 @@
       </p:pic>
       <p:sp>
         <p:nvSpPr>
-          <p:cNvPr id="8" name="TextBox 7"/>
+          <p:cNvPr id="9" name="TextBox 8"/>
           <p:cNvSpPr txBox="1"/>
           <p:nvPr/>
         </p:nvSpPr>
@@ -5973,7 +6018,7 @@
       </p:sp>
       <p:sp>
         <p:nvSpPr>
-          <p:cNvPr id="9" name="TextBox 8"/>
+          <p:cNvPr id="10" name="TextBox 9"/>
           <p:cNvSpPr txBox="1"/>
           <p:nvPr/>
         </p:nvSpPr>
@@ -6020,7 +6065,7 @@
       </p:sp>
       <p:sp>
         <p:nvSpPr>
-          <p:cNvPr id="10" name="TextBox 9"/>
+          <p:cNvPr id="11" name="TextBox 10"/>
           <p:cNvSpPr txBox="1"/>
           <p:nvPr/>
         </p:nvSpPr>
@@ -6067,7 +6112,7 @@
       </p:sp>
       <p:sp>
         <p:nvSpPr>
-          <p:cNvPr id="11" name="TextBox 10"/>
+          <p:cNvPr id="12" name="TextBox 11"/>
           <p:cNvSpPr txBox="1"/>
           <p:nvPr/>
         </p:nvSpPr>
@@ -6256,8 +6301,8 @@
         </p:nvSpPr>
         <p:spPr>
           <a:xfrm>
-            <a:off x="5686686" y="182880"/>
-            <a:ext cx="6227945" cy="786384"/>
+            <a:off x="5829346" y="182880"/>
+            <a:ext cx="6085285" cy="786384"/>
           </a:xfrm>
           <a:prstGeom prst="roundRect">
             <a:avLst>
@@ -6309,7 +6354,7 @@
         </p:blipFill>
         <p:spPr>
           <a:xfrm>
-            <a:off x="5851278" y="292608"/>
+            <a:off x="5993938" y="292608"/>
             <a:ext cx="835472" cy="566928"/>
           </a:xfrm>
           <a:prstGeom prst="rect">
@@ -6333,8 +6378,8 @@
         </p:blipFill>
         <p:spPr>
           <a:xfrm>
-            <a:off x="6869630" y="292608"/>
-            <a:ext cx="1598327" cy="566928"/>
+            <a:off x="7012291" y="292608"/>
+            <a:ext cx="1646830" cy="566928"/>
           </a:xfrm>
           <a:prstGeom prst="rect">
             <a:avLst/>
@@ -6357,8 +6402,8 @@
         </p:blipFill>
         <p:spPr>
           <a:xfrm>
-            <a:off x="8650838" y="292608"/>
-            <a:ext cx="1285036" cy="566928"/>
+            <a:off x="8842002" y="292608"/>
+            <a:ext cx="1093872" cy="566928"/>
           </a:xfrm>
           <a:prstGeom prst="rect">
             <a:avLst/>
@@ -6639,8 +6684,8 @@
         </p:nvSpPr>
         <p:spPr>
           <a:xfrm>
-            <a:off x="5686686" y="182880"/>
-            <a:ext cx="6227945" cy="786384"/>
+            <a:off x="5829346" y="182880"/>
+            <a:ext cx="6085285" cy="786384"/>
           </a:xfrm>
           <a:prstGeom prst="roundRect">
             <a:avLst>
@@ -6692,7 +6737,7 @@
         </p:blipFill>
         <p:spPr>
           <a:xfrm>
-            <a:off x="5851278" y="292608"/>
+            <a:off x="5993938" y="292608"/>
             <a:ext cx="835472" cy="566928"/>
           </a:xfrm>
           <a:prstGeom prst="rect">
@@ -6716,8 +6761,8 @@
         </p:blipFill>
         <p:spPr>
           <a:xfrm>
-            <a:off x="6869630" y="292608"/>
-            <a:ext cx="1598327" cy="566928"/>
+            <a:off x="7012291" y="292608"/>
+            <a:ext cx="1646830" cy="566928"/>
           </a:xfrm>
           <a:prstGeom prst="rect">
             <a:avLst/>
@@ -6740,8 +6785,8 @@
         </p:blipFill>
         <p:spPr>
           <a:xfrm>
-            <a:off x="8650838" y="292608"/>
-            <a:ext cx="1285036" cy="566928"/>
+            <a:off x="8842002" y="292608"/>
+            <a:ext cx="1093872" cy="566928"/>
           </a:xfrm>
           <a:prstGeom prst="rect">
             <a:avLst/>
@@ -7022,8 +7067,8 @@
         </p:nvSpPr>
         <p:spPr>
           <a:xfrm>
-            <a:off x="5686686" y="182880"/>
-            <a:ext cx="6227945" cy="786384"/>
+            <a:off x="5829346" y="182880"/>
+            <a:ext cx="6085285" cy="786384"/>
           </a:xfrm>
           <a:prstGeom prst="roundRect">
             <a:avLst>
@@ -7075,7 +7120,7 @@
         </p:blipFill>
         <p:spPr>
           <a:xfrm>
-            <a:off x="5851278" y="292608"/>
+            <a:off x="5993938" y="292608"/>
             <a:ext cx="835472" cy="566928"/>
           </a:xfrm>
           <a:prstGeom prst="rect">
@@ -7099,8 +7144,8 @@
         </p:blipFill>
         <p:spPr>
           <a:xfrm>
-            <a:off x="6869630" y="292608"/>
-            <a:ext cx="1598327" cy="566928"/>
+            <a:off x="7012291" y="292608"/>
+            <a:ext cx="1646830" cy="566928"/>
           </a:xfrm>
           <a:prstGeom prst="rect">
             <a:avLst/>
@@ -7123,8 +7168,8 @@
         </p:blipFill>
         <p:spPr>
           <a:xfrm>
-            <a:off x="8650838" y="292608"/>
-            <a:ext cx="1285036" cy="566928"/>
+            <a:off x="8842002" y="292608"/>
+            <a:ext cx="1093872" cy="566928"/>
           </a:xfrm>
           <a:prstGeom prst="rect">
             <a:avLst/>
@@ -7405,8 +7450,8 @@
         </p:nvSpPr>
         <p:spPr>
           <a:xfrm>
-            <a:off x="5686686" y="182880"/>
-            <a:ext cx="6227945" cy="786384"/>
+            <a:off x="5829346" y="182880"/>
+            <a:ext cx="6085285" cy="786384"/>
           </a:xfrm>
           <a:prstGeom prst="roundRect">
             <a:avLst>
@@ -7458,7 +7503,7 @@
         </p:blipFill>
         <p:spPr>
           <a:xfrm>
-            <a:off x="5851278" y="292608"/>
+            <a:off x="5993938" y="292608"/>
             <a:ext cx="835472" cy="566928"/>
           </a:xfrm>
           <a:prstGeom prst="rect">
@@ -7482,8 +7527,8 @@
         </p:blipFill>
         <p:spPr>
           <a:xfrm>
-            <a:off x="6869630" y="292608"/>
-            <a:ext cx="1598327" cy="566928"/>
+            <a:off x="7012291" y="292608"/>
+            <a:ext cx="1646830" cy="566928"/>
           </a:xfrm>
           <a:prstGeom prst="rect">
             <a:avLst/>
@@ -7506,8 +7551,8 @@
         </p:blipFill>
         <p:spPr>
           <a:xfrm>
-            <a:off x="8650838" y="292608"/>
-            <a:ext cx="1285036" cy="566928"/>
+            <a:off x="8842002" y="292608"/>
+            <a:ext cx="1093872" cy="566928"/>
           </a:xfrm>
           <a:prstGeom prst="rect">
             <a:avLst/>
@@ -7788,8 +7833,8 @@
         </p:nvSpPr>
         <p:spPr>
           <a:xfrm>
-            <a:off x="5686686" y="182880"/>
-            <a:ext cx="6227945" cy="786384"/>
+            <a:off x="5829346" y="182880"/>
+            <a:ext cx="6085285" cy="786384"/>
           </a:xfrm>
           <a:prstGeom prst="roundRect">
             <a:avLst>
@@ -7841,7 +7886,7 @@
         </p:blipFill>
         <p:spPr>
           <a:xfrm>
-            <a:off x="5851278" y="292608"/>
+            <a:off x="5993938" y="292608"/>
             <a:ext cx="835472" cy="566928"/>
           </a:xfrm>
           <a:prstGeom prst="rect">
@@ -7865,8 +7910,8 @@
         </p:blipFill>
         <p:spPr>
           <a:xfrm>
-            <a:off x="6869630" y="292608"/>
-            <a:ext cx="1598327" cy="566928"/>
+            <a:off x="7012291" y="292608"/>
+            <a:ext cx="1646830" cy="566928"/>
           </a:xfrm>
           <a:prstGeom prst="rect">
             <a:avLst/>
@@ -7889,8 +7934,8 @@
         </p:blipFill>
         <p:spPr>
           <a:xfrm>
-            <a:off x="8650838" y="292608"/>
-            <a:ext cx="1285036" cy="566928"/>
+            <a:off x="8842002" y="292608"/>
+            <a:ext cx="1093872" cy="566928"/>
           </a:xfrm>
           <a:prstGeom prst="rect">
             <a:avLst/>
@@ -8171,8 +8216,8 @@
         </p:nvSpPr>
         <p:spPr>
           <a:xfrm>
-            <a:off x="5686686" y="182880"/>
-            <a:ext cx="6227945" cy="786384"/>
+            <a:off x="5829346" y="182880"/>
+            <a:ext cx="6085285" cy="786384"/>
           </a:xfrm>
           <a:prstGeom prst="roundRect">
             <a:avLst>
@@ -8224,7 +8269,7 @@
         </p:blipFill>
         <p:spPr>
           <a:xfrm>
-            <a:off x="5851278" y="292608"/>
+            <a:off x="5993938" y="292608"/>
             <a:ext cx="835472" cy="566928"/>
           </a:xfrm>
           <a:prstGeom prst="rect">
@@ -8248,8 +8293,8 @@
         </p:blipFill>
         <p:spPr>
           <a:xfrm>
-            <a:off x="6869630" y="292608"/>
-            <a:ext cx="1598327" cy="566928"/>
+            <a:off x="7012291" y="292608"/>
+            <a:ext cx="1646830" cy="566928"/>
           </a:xfrm>
           <a:prstGeom prst="rect">
             <a:avLst/>
@@ -8272,8 +8317,8 @@
         </p:blipFill>
         <p:spPr>
           <a:xfrm>
-            <a:off x="8650838" y="292608"/>
-            <a:ext cx="1285036" cy="566928"/>
+            <a:off x="8842002" y="292608"/>
+            <a:ext cx="1093872" cy="566928"/>
           </a:xfrm>
           <a:prstGeom prst="rect">
             <a:avLst/>
@@ -8554,8 +8599,8 @@
         </p:nvSpPr>
         <p:spPr>
           <a:xfrm>
-            <a:off x="5686686" y="182880"/>
-            <a:ext cx="6227945" cy="786384"/>
+            <a:off x="5829346" y="182880"/>
+            <a:ext cx="6085285" cy="786384"/>
           </a:xfrm>
           <a:prstGeom prst="roundRect">
             <a:avLst>
@@ -8607,7 +8652,7 @@
         </p:blipFill>
         <p:spPr>
           <a:xfrm>
-            <a:off x="5851278" y="292608"/>
+            <a:off x="5993938" y="292608"/>
             <a:ext cx="835472" cy="566928"/>
           </a:xfrm>
           <a:prstGeom prst="rect">
@@ -8631,8 +8676,8 @@
         </p:blipFill>
         <p:spPr>
           <a:xfrm>
-            <a:off x="6869630" y="292608"/>
-            <a:ext cx="1598327" cy="566928"/>
+            <a:off x="7012291" y="292608"/>
+            <a:ext cx="1646830" cy="566928"/>
           </a:xfrm>
           <a:prstGeom prst="rect">
             <a:avLst/>
@@ -8655,8 +8700,8 @@
         </p:blipFill>
         <p:spPr>
           <a:xfrm>
-            <a:off x="8650838" y="292608"/>
-            <a:ext cx="1285036" cy="566928"/>
+            <a:off x="8842002" y="292608"/>
+            <a:ext cx="1093872" cy="566928"/>
           </a:xfrm>
           <a:prstGeom prst="rect">
             <a:avLst/>
@@ -8937,8 +8982,8 @@
         </p:nvSpPr>
         <p:spPr>
           <a:xfrm>
-            <a:off x="5686686" y="182880"/>
-            <a:ext cx="6227945" cy="786384"/>
+            <a:off x="5829346" y="182880"/>
+            <a:ext cx="6085285" cy="786384"/>
           </a:xfrm>
           <a:prstGeom prst="roundRect">
             <a:avLst>
@@ -8990,7 +9035,7 @@
         </p:blipFill>
         <p:spPr>
           <a:xfrm>
-            <a:off x="5851278" y="292608"/>
+            <a:off x="5993938" y="292608"/>
             <a:ext cx="835472" cy="566928"/>
           </a:xfrm>
           <a:prstGeom prst="rect">
@@ -9014,8 +9059,8 @@
         </p:blipFill>
         <p:spPr>
           <a:xfrm>
-            <a:off x="6869630" y="292608"/>
-            <a:ext cx="1598327" cy="566928"/>
+            <a:off x="7012291" y="292608"/>
+            <a:ext cx="1646830" cy="566928"/>
           </a:xfrm>
           <a:prstGeom prst="rect">
             <a:avLst/>
@@ -9038,8 +9083,8 @@
         </p:blipFill>
         <p:spPr>
           <a:xfrm>
-            <a:off x="8650838" y="292608"/>
-            <a:ext cx="1285036" cy="566928"/>
+            <a:off x="8842002" y="292608"/>
+            <a:ext cx="1093872" cy="566928"/>
           </a:xfrm>
           <a:prstGeom prst="rect">
             <a:avLst/>
@@ -9320,8 +9365,8 @@
         </p:nvSpPr>
         <p:spPr>
           <a:xfrm>
-            <a:off x="5686686" y="182880"/>
-            <a:ext cx="6227945" cy="786384"/>
+            <a:off x="5829346" y="182880"/>
+            <a:ext cx="6085285" cy="786384"/>
           </a:xfrm>
           <a:prstGeom prst="roundRect">
             <a:avLst>
@@ -9373,7 +9418,7 @@
         </p:blipFill>
         <p:spPr>
           <a:xfrm>
-            <a:off x="5851278" y="292608"/>
+            <a:off x="5993938" y="292608"/>
             <a:ext cx="835472" cy="566928"/>
           </a:xfrm>
           <a:prstGeom prst="rect">
@@ -9397,8 +9442,8 @@
         </p:blipFill>
         <p:spPr>
           <a:xfrm>
-            <a:off x="6869630" y="292608"/>
-            <a:ext cx="1598327" cy="566928"/>
+            <a:off x="7012291" y="292608"/>
+            <a:ext cx="1646830" cy="566928"/>
           </a:xfrm>
           <a:prstGeom prst="rect">
             <a:avLst/>
@@ -9421,8 +9466,8 @@
         </p:blipFill>
         <p:spPr>
           <a:xfrm>
-            <a:off x="8650838" y="292608"/>
-            <a:ext cx="1285036" cy="566928"/>
+            <a:off x="8842002" y="292608"/>
+            <a:ext cx="1093872" cy="566928"/>
           </a:xfrm>
           <a:prstGeom prst="rect">
             <a:avLst/>
@@ -9762,8 +9807,8 @@
         </p:nvSpPr>
         <p:spPr>
           <a:xfrm>
-            <a:off x="5686686" y="182880"/>
-            <a:ext cx="6227945" cy="786384"/>
+            <a:off x="5829346" y="182880"/>
+            <a:ext cx="6085285" cy="786384"/>
           </a:xfrm>
           <a:prstGeom prst="roundRect">
             <a:avLst>
@@ -9815,7 +9860,7 @@
         </p:blipFill>
         <p:spPr>
           <a:xfrm>
-            <a:off x="5851278" y="292608"/>
+            <a:off x="5993938" y="292608"/>
             <a:ext cx="835472" cy="566928"/>
           </a:xfrm>
           <a:prstGeom prst="rect">
@@ -9839,8 +9884,8 @@
         </p:blipFill>
         <p:spPr>
           <a:xfrm>
-            <a:off x="6869630" y="292608"/>
-            <a:ext cx="1598327" cy="566928"/>
+            <a:off x="7012291" y="292608"/>
+            <a:ext cx="1646830" cy="566928"/>
           </a:xfrm>
           <a:prstGeom prst="rect">
             <a:avLst/>
@@ -9863,8 +9908,8 @@
         </p:blipFill>
         <p:spPr>
           <a:xfrm>
-            <a:off x="8650838" y="292608"/>
-            <a:ext cx="1285036" cy="566928"/>
+            <a:off x="8842002" y="292608"/>
+            <a:ext cx="1093872" cy="566928"/>
           </a:xfrm>
           <a:prstGeom prst="rect">
             <a:avLst/>
@@ -10114,9 +10159,54 @@
           </a:prstGeom>
         </p:spPr>
       </p:pic>
-      <p:pic>
-        <p:nvPicPr>
-          <p:cNvPr id="3" name="Logo_sg" descr="sg.png"/>
+      <p:sp>
+        <p:nvSpPr>
+          <p:cNvPr id="3" name="LogoStrip"/>
+          <p:cNvSpPr/>
+          <p:nvPr/>
+        </p:nvSpPr>
+        <p:spPr>
+          <a:xfrm>
+            <a:off x="5829346" y="182880"/>
+            <a:ext cx="6085285" cy="786384"/>
+          </a:xfrm>
+          <a:prstGeom prst="roundRect">
+            <a:avLst>
+              <a:gd name="adj" fmla="val 18000"/>
+            </a:avLst>
+          </a:prstGeom>
+          <a:solidFill>
+            <a:srgbClr val="FFFFFF"/>
+          </a:solidFill>
+          <a:ln>
+            <a:noFill/>
+          </a:ln>
+        </p:spPr>
+        <p:style>
+          <a:lnRef idx="1">
+            <a:schemeClr val="accent1"/>
+          </a:lnRef>
+          <a:fillRef idx="3">
+            <a:schemeClr val="accent1"/>
+          </a:fillRef>
+          <a:effectRef idx="2">
+            <a:schemeClr val="accent1"/>
+          </a:effectRef>
+          <a:fontRef idx="minor">
+            <a:schemeClr val="lt1"/>
+          </a:fontRef>
+        </p:style>
+        <p:txBody>
+          <a:bodyPr rtlCol="0" anchor="ctr"/>
+          <a:lstStyle/>
+          <a:p>
+            <a:pPr algn="ctr"/>
+          </a:p>
+        </p:txBody>
+      </p:sp>
+      <p:pic>
+        <p:nvPicPr>
+          <p:cNvPr id="4" name="Logo_sg" descr="sg.png"/>
           <p:cNvPicPr>
             <a:picLocks noChangeAspect="1"/>
           </p:cNvPicPr>
@@ -10130,7 +10220,7 @@
         </p:blipFill>
         <p:spPr>
           <a:xfrm>
-            <a:off x="5851278" y="292608"/>
+            <a:off x="5993938" y="292608"/>
             <a:ext cx="835472" cy="566928"/>
           </a:xfrm>
           <a:prstGeom prst="rect">
@@ -10140,7 +10230,7 @@
       </p:pic>
       <p:pic>
         <p:nvPicPr>
-          <p:cNvPr id="4" name="Logo_scdf" descr="scdf.png"/>
+          <p:cNvPr id="5" name="Logo_scdf" descr="scdf.png"/>
           <p:cNvPicPr>
             <a:picLocks noChangeAspect="1"/>
           </p:cNvPicPr>
@@ -10154,17 +10244,17 @@
         </p:blipFill>
         <p:spPr>
           <a:xfrm>
-            <a:off x="6869630" y="292608"/>
-            <a:ext cx="1598327" cy="566928"/>
-          </a:xfrm>
-          <a:prstGeom prst="rect">
-            <a:avLst/>
-          </a:prstGeom>
-        </p:spPr>
-      </p:pic>
-      <p:pic>
-        <p:nvPicPr>
-          <p:cNvPr id="5" name="Logo_cosem" descr="cosem.png"/>
+            <a:off x="7012291" y="292608"/>
+            <a:ext cx="1646830" cy="566928"/>
+          </a:xfrm>
+          <a:prstGeom prst="rect">
+            <a:avLst/>
+          </a:prstGeom>
+        </p:spPr>
+      </p:pic>
+      <p:pic>
+        <p:nvPicPr>
+          <p:cNvPr id="6" name="Logo_cosem" descr="cosem.png"/>
           <p:cNvPicPr>
             <a:picLocks noChangeAspect="1"/>
           </p:cNvPicPr>
@@ -10178,17 +10268,17 @@
         </p:blipFill>
         <p:spPr>
           <a:xfrm>
-            <a:off x="8650838" y="292608"/>
-            <a:ext cx="1285036" cy="566928"/>
-          </a:xfrm>
-          <a:prstGeom prst="rect">
-            <a:avLst/>
-          </a:prstGeom>
-        </p:spPr>
-      </p:pic>
-      <p:pic>
-        <p:nvPicPr>
-          <p:cNvPr id="6" name="Logo_adrc" descr="adrc.png"/>
+            <a:off x="8842002" y="292608"/>
+            <a:ext cx="1093872" cy="566928"/>
+          </a:xfrm>
+          <a:prstGeom prst="rect">
+            <a:avLst/>
+          </a:prstGeom>
+        </p:spPr>
+      </p:pic>
+      <p:pic>
+        <p:nvPicPr>
+          <p:cNvPr id="7" name="Logo_adrc" descr="adrc.png"/>
           <p:cNvPicPr>
             <a:picLocks noChangeAspect="1"/>
           </p:cNvPicPr>
@@ -10212,7 +10302,7 @@
       </p:pic>
       <p:pic>
         <p:nvPicPr>
-          <p:cNvPr id="7" name="Logo_jp" descr="jp.png"/>
+          <p:cNvPr id="8" name="Logo_jp" descr="jp.png"/>
           <p:cNvPicPr>
             <a:picLocks noChangeAspect="1"/>
           </p:cNvPicPr>
@@ -10236,7 +10326,7 @@
       </p:pic>
       <p:sp>
         <p:nvSpPr>
-          <p:cNvPr id="8" name="TextBox 7"/>
+          <p:cNvPr id="9" name="TextBox 8"/>
           <p:cNvSpPr txBox="1"/>
           <p:nvPr/>
         </p:nvSpPr>
@@ -10283,7 +10373,7 @@
       </p:sp>
       <p:sp>
         <p:nvSpPr>
-          <p:cNvPr id="9" name="TextBox 8"/>
+          <p:cNvPr id="10" name="TextBox 9"/>
           <p:cNvSpPr txBox="1"/>
           <p:nvPr/>
         </p:nvSpPr>
@@ -10330,7 +10420,7 @@
       </p:sp>
       <p:sp>
         <p:nvSpPr>
-          <p:cNvPr id="10" name="TextBox 9"/>
+          <p:cNvPr id="11" name="TextBox 10"/>
           <p:cNvSpPr txBox="1"/>
           <p:nvPr/>
         </p:nvSpPr>
@@ -10377,7 +10467,7 @@
       </p:sp>
       <p:sp>
         <p:nvSpPr>
-          <p:cNvPr id="11" name="TextBox 10"/>
+          <p:cNvPr id="12" name="TextBox 11"/>
           <p:cNvSpPr txBox="1"/>
           <p:nvPr/>
         </p:nvSpPr>
@@ -10554,8 +10644,8 @@
         </p:nvSpPr>
         <p:spPr>
           <a:xfrm>
-            <a:off x="5686686" y="182880"/>
-            <a:ext cx="6227945" cy="786384"/>
+            <a:off x="5829346" y="182880"/>
+            <a:ext cx="6085285" cy="786384"/>
           </a:xfrm>
           <a:prstGeom prst="roundRect">
             <a:avLst>
@@ -10607,7 +10697,7 @@
         </p:blipFill>
         <p:spPr>
           <a:xfrm>
-            <a:off x="5851278" y="292608"/>
+            <a:off x="5993938" y="292608"/>
             <a:ext cx="835472" cy="566928"/>
           </a:xfrm>
           <a:prstGeom prst="rect">
@@ -10631,8 +10721,8 @@
         </p:blipFill>
         <p:spPr>
           <a:xfrm>
-            <a:off x="6869630" y="292608"/>
-            <a:ext cx="1598327" cy="566928"/>
+            <a:off x="7012291" y="292608"/>
+            <a:ext cx="1646830" cy="566928"/>
           </a:xfrm>
           <a:prstGeom prst="rect">
             <a:avLst/>
@@ -10655,8 +10745,8 @@
         </p:blipFill>
         <p:spPr>
           <a:xfrm>
-            <a:off x="8650838" y="292608"/>
-            <a:ext cx="1285036" cy="566928"/>
+            <a:off x="8842002" y="292608"/>
+            <a:ext cx="1093872" cy="566928"/>
           </a:xfrm>
           <a:prstGeom prst="rect">
             <a:avLst/>
@@ -10937,8 +11027,8 @@
         </p:nvSpPr>
         <p:spPr>
           <a:xfrm>
-            <a:off x="5686686" y="182880"/>
-            <a:ext cx="6227945" cy="786384"/>
+            <a:off x="5829346" y="182880"/>
+            <a:ext cx="6085285" cy="786384"/>
           </a:xfrm>
           <a:prstGeom prst="roundRect">
             <a:avLst>
@@ -10990,7 +11080,7 @@
         </p:blipFill>
         <p:spPr>
           <a:xfrm>
-            <a:off x="5851278" y="292608"/>
+            <a:off x="5993938" y="292608"/>
             <a:ext cx="835472" cy="566928"/>
           </a:xfrm>
           <a:prstGeom prst="rect">
@@ -11014,8 +11104,8 @@
         </p:blipFill>
         <p:spPr>
           <a:xfrm>
-            <a:off x="6869630" y="292608"/>
-            <a:ext cx="1598327" cy="566928"/>
+            <a:off x="7012291" y="292608"/>
+            <a:ext cx="1646830" cy="566928"/>
           </a:xfrm>
           <a:prstGeom prst="rect">
             <a:avLst/>
@@ -11038,8 +11128,8 @@
         </p:blipFill>
         <p:spPr>
           <a:xfrm>
-            <a:off x="8650838" y="292608"/>
-            <a:ext cx="1285036" cy="566928"/>
+            <a:off x="8842002" y="292608"/>
+            <a:ext cx="1093872" cy="566928"/>
           </a:xfrm>
           <a:prstGeom prst="rect">
             <a:avLst/>
@@ -11320,8 +11410,8 @@
         </p:nvSpPr>
         <p:spPr>
           <a:xfrm>
-            <a:off x="5686686" y="182880"/>
-            <a:ext cx="6227945" cy="786384"/>
+            <a:off x="5829346" y="182880"/>
+            <a:ext cx="6085285" cy="786384"/>
           </a:xfrm>
           <a:prstGeom prst="roundRect">
             <a:avLst>
@@ -11373,7 +11463,7 @@
         </p:blipFill>
         <p:spPr>
           <a:xfrm>
-            <a:off x="5851278" y="292608"/>
+            <a:off x="5993938" y="292608"/>
             <a:ext cx="835472" cy="566928"/>
           </a:xfrm>
           <a:prstGeom prst="rect">
@@ -11397,8 +11487,8 @@
         </p:blipFill>
         <p:spPr>
           <a:xfrm>
-            <a:off x="6869630" y="292608"/>
-            <a:ext cx="1598327" cy="566928"/>
+            <a:off x="7012291" y="292608"/>
+            <a:ext cx="1646830" cy="566928"/>
           </a:xfrm>
           <a:prstGeom prst="rect">
             <a:avLst/>
@@ -11421,8 +11511,8 @@
         </p:blipFill>
         <p:spPr>
           <a:xfrm>
-            <a:off x="8650838" y="292608"/>
-            <a:ext cx="1285036" cy="566928"/>
+            <a:off x="8842002" y="292608"/>
+            <a:ext cx="1093872" cy="566928"/>
           </a:xfrm>
           <a:prstGeom prst="rect">
             <a:avLst/>
@@ -11703,8 +11793,8 @@
         </p:nvSpPr>
         <p:spPr>
           <a:xfrm>
-            <a:off x="5686686" y="182880"/>
-            <a:ext cx="6227945" cy="786384"/>
+            <a:off x="5829346" y="182880"/>
+            <a:ext cx="6085285" cy="786384"/>
           </a:xfrm>
           <a:prstGeom prst="roundRect">
             <a:avLst>
@@ -11756,7 +11846,7 @@
         </p:blipFill>
         <p:spPr>
           <a:xfrm>
-            <a:off x="5851278" y="292608"/>
+            <a:off x="5993938" y="292608"/>
             <a:ext cx="835472" cy="566928"/>
           </a:xfrm>
           <a:prstGeom prst="rect">
@@ -11780,8 +11870,8 @@
         </p:blipFill>
         <p:spPr>
           <a:xfrm>
-            <a:off x="6869630" y="292608"/>
-            <a:ext cx="1598327" cy="566928"/>
+            <a:off x="7012291" y="292608"/>
+            <a:ext cx="1646830" cy="566928"/>
           </a:xfrm>
           <a:prstGeom prst="rect">
             <a:avLst/>
@@ -11804,8 +11894,8 @@
         </p:blipFill>
         <p:spPr>
           <a:xfrm>
-            <a:off x="8650838" y="292608"/>
-            <a:ext cx="1285036" cy="566928"/>
+            <a:off x="8842002" y="292608"/>
+            <a:ext cx="1093872" cy="566928"/>
           </a:xfrm>
           <a:prstGeom prst="rect">
             <a:avLst/>
@@ -12086,8 +12176,8 @@
         </p:nvSpPr>
         <p:spPr>
           <a:xfrm>
-            <a:off x="5686686" y="182880"/>
-            <a:ext cx="6227945" cy="786384"/>
+            <a:off x="5829346" y="182880"/>
+            <a:ext cx="6085285" cy="786384"/>
           </a:xfrm>
           <a:prstGeom prst="roundRect">
             <a:avLst>
@@ -12139,7 +12229,7 @@
         </p:blipFill>
         <p:spPr>
           <a:xfrm>
-            <a:off x="5851278" y="292608"/>
+            <a:off x="5993938" y="292608"/>
             <a:ext cx="835472" cy="566928"/>
           </a:xfrm>
           <a:prstGeom prst="rect">
@@ -12163,8 +12253,8 @@
         </p:blipFill>
         <p:spPr>
           <a:xfrm>
-            <a:off x="6869630" y="292608"/>
-            <a:ext cx="1598327" cy="566928"/>
+            <a:off x="7012291" y="292608"/>
+            <a:ext cx="1646830" cy="566928"/>
           </a:xfrm>
           <a:prstGeom prst="rect">
             <a:avLst/>
@@ -12187,8 +12277,8 @@
         </p:blipFill>
         <p:spPr>
           <a:xfrm>
-            <a:off x="8650838" y="292608"/>
-            <a:ext cx="1285036" cy="566928"/>
+            <a:off x="8842002" y="292608"/>
+            <a:ext cx="1093872" cy="566928"/>
           </a:xfrm>
           <a:prstGeom prst="rect">
             <a:avLst/>
@@ -12469,8 +12559,8 @@
         </p:nvSpPr>
         <p:spPr>
           <a:xfrm>
-            <a:off x="5686686" y="182880"/>
-            <a:ext cx="6227945" cy="786384"/>
+            <a:off x="5829346" y="182880"/>
+            <a:ext cx="6085285" cy="786384"/>
           </a:xfrm>
           <a:prstGeom prst="roundRect">
             <a:avLst>
@@ -12522,7 +12612,7 @@
         </p:blipFill>
         <p:spPr>
           <a:xfrm>
-            <a:off x="5851278" y="292608"/>
+            <a:off x="5993938" y="292608"/>
             <a:ext cx="835472" cy="566928"/>
           </a:xfrm>
           <a:prstGeom prst="rect">
@@ -12546,8 +12636,8 @@
         </p:blipFill>
         <p:spPr>
           <a:xfrm>
-            <a:off x="6869630" y="292608"/>
-            <a:ext cx="1598327" cy="566928"/>
+            <a:off x="7012291" y="292608"/>
+            <a:ext cx="1646830" cy="566928"/>
           </a:xfrm>
           <a:prstGeom prst="rect">
             <a:avLst/>
@@ -12570,8 +12660,8 @@
         </p:blipFill>
         <p:spPr>
           <a:xfrm>
-            <a:off x="8650838" y="292608"/>
-            <a:ext cx="1285036" cy="566928"/>
+            <a:off x="8842002" y="292608"/>
+            <a:ext cx="1093872" cy="566928"/>
           </a:xfrm>
           <a:prstGeom prst="rect">
             <a:avLst/>
@@ -12852,8 +12942,8 @@
         </p:nvSpPr>
         <p:spPr>
           <a:xfrm>
-            <a:off x="5686686" y="182880"/>
-            <a:ext cx="6227945" cy="786384"/>
+            <a:off x="5829346" y="182880"/>
+            <a:ext cx="6085285" cy="786384"/>
           </a:xfrm>
           <a:prstGeom prst="roundRect">
             <a:avLst>
@@ -12905,7 +12995,7 @@
         </p:blipFill>
         <p:spPr>
           <a:xfrm>
-            <a:off x="5851278" y="292608"/>
+            <a:off x="5993938" y="292608"/>
             <a:ext cx="835472" cy="566928"/>
           </a:xfrm>
           <a:prstGeom prst="rect">
@@ -12929,8 +13019,8 @@
         </p:blipFill>
         <p:spPr>
           <a:xfrm>
-            <a:off x="6869630" y="292608"/>
-            <a:ext cx="1598327" cy="566928"/>
+            <a:off x="7012291" y="292608"/>
+            <a:ext cx="1646830" cy="566928"/>
           </a:xfrm>
           <a:prstGeom prst="rect">
             <a:avLst/>
@@ -12953,8 +13043,8 @@
         </p:blipFill>
         <p:spPr>
           <a:xfrm>
-            <a:off x="8650838" y="292608"/>
-            <a:ext cx="1285036" cy="566928"/>
+            <a:off x="8842002" y="292608"/>
+            <a:ext cx="1093872" cy="566928"/>
           </a:xfrm>
           <a:prstGeom prst="rect">
             <a:avLst/>
@@ -13235,8 +13325,8 @@
         </p:nvSpPr>
         <p:spPr>
           <a:xfrm>
-            <a:off x="5686686" y="182880"/>
-            <a:ext cx="6227945" cy="786384"/>
+            <a:off x="5829346" y="182880"/>
+            <a:ext cx="6085285" cy="786384"/>
           </a:xfrm>
           <a:prstGeom prst="roundRect">
             <a:avLst>
@@ -13288,7 +13378,7 @@
         </p:blipFill>
         <p:spPr>
           <a:xfrm>
-            <a:off x="5851278" y="292608"/>
+            <a:off x="5993938" y="292608"/>
             <a:ext cx="835472" cy="566928"/>
           </a:xfrm>
           <a:prstGeom prst="rect">
@@ -13312,8 +13402,8 @@
         </p:blipFill>
         <p:spPr>
           <a:xfrm>
-            <a:off x="6869630" y="292608"/>
-            <a:ext cx="1598327" cy="566928"/>
+            <a:off x="7012291" y="292608"/>
+            <a:ext cx="1646830" cy="566928"/>
           </a:xfrm>
           <a:prstGeom prst="rect">
             <a:avLst/>
@@ -13336,8 +13426,8 @@
         </p:blipFill>
         <p:spPr>
           <a:xfrm>
-            <a:off x="8650838" y="292608"/>
-            <a:ext cx="1285036" cy="566928"/>
+            <a:off x="8842002" y="292608"/>
+            <a:ext cx="1093872" cy="566928"/>
           </a:xfrm>
           <a:prstGeom prst="rect">
             <a:avLst/>
@@ -13618,8 +13708,8 @@
         </p:nvSpPr>
         <p:spPr>
           <a:xfrm>
-            <a:off x="5686686" y="182880"/>
-            <a:ext cx="6227945" cy="786384"/>
+            <a:off x="5829346" y="182880"/>
+            <a:ext cx="6085285" cy="786384"/>
           </a:xfrm>
           <a:prstGeom prst="roundRect">
             <a:avLst>
@@ -13671,7 +13761,7 @@
         </p:blipFill>
         <p:spPr>
           <a:xfrm>
-            <a:off x="5851278" y="292608"/>
+            <a:off x="5993938" y="292608"/>
             <a:ext cx="835472" cy="566928"/>
           </a:xfrm>
           <a:prstGeom prst="rect">
@@ -13695,8 +13785,8 @@
         </p:blipFill>
         <p:spPr>
           <a:xfrm>
-            <a:off x="6869630" y="292608"/>
-            <a:ext cx="1598327" cy="566928"/>
+            <a:off x="7012291" y="292608"/>
+            <a:ext cx="1646830" cy="566928"/>
           </a:xfrm>
           <a:prstGeom prst="rect">
             <a:avLst/>
@@ -13719,8 +13809,8 @@
         </p:blipFill>
         <p:spPr>
           <a:xfrm>
-            <a:off x="8650838" y="292608"/>
-            <a:ext cx="1285036" cy="566928"/>
+            <a:off x="8842002" y="292608"/>
+            <a:ext cx="1093872" cy="566928"/>
           </a:xfrm>
           <a:prstGeom prst="rect">
             <a:avLst/>
@@ -14001,8 +14091,8 @@
         </p:nvSpPr>
         <p:spPr>
           <a:xfrm>
-            <a:off x="5686686" y="182880"/>
-            <a:ext cx="6227945" cy="786384"/>
+            <a:off x="5829346" y="182880"/>
+            <a:ext cx="6085285" cy="786384"/>
           </a:xfrm>
           <a:prstGeom prst="roundRect">
             <a:avLst>
@@ -14054,7 +14144,7 @@
         </p:blipFill>
         <p:spPr>
           <a:xfrm>
-            <a:off x="5851278" y="292608"/>
+            <a:off x="5993938" y="292608"/>
             <a:ext cx="835472" cy="566928"/>
           </a:xfrm>
           <a:prstGeom prst="rect">
@@ -14078,8 +14168,8 @@
         </p:blipFill>
         <p:spPr>
           <a:xfrm>
-            <a:off x="6869630" y="292608"/>
-            <a:ext cx="1598327" cy="566928"/>
+            <a:off x="7012291" y="292608"/>
+            <a:ext cx="1646830" cy="566928"/>
           </a:xfrm>
           <a:prstGeom prst="rect">
             <a:avLst/>
@@ -14102,8 +14192,8 @@
         </p:blipFill>
         <p:spPr>
           <a:xfrm>
-            <a:off x="8650838" y="292608"/>
-            <a:ext cx="1285036" cy="566928"/>
+            <a:off x="8842002" y="292608"/>
+            <a:ext cx="1093872" cy="566928"/>
           </a:xfrm>
           <a:prstGeom prst="rect">
             <a:avLst/>
@@ -14384,8 +14474,8 @@
         </p:nvSpPr>
         <p:spPr>
           <a:xfrm>
-            <a:off x="5686686" y="182880"/>
-            <a:ext cx="6227945" cy="786384"/>
+            <a:off x="5829346" y="182880"/>
+            <a:ext cx="6085285" cy="786384"/>
           </a:xfrm>
           <a:prstGeom prst="roundRect">
             <a:avLst>
@@ -14437,7 +14527,7 @@
         </p:blipFill>
         <p:spPr>
           <a:xfrm>
-            <a:off x="5851278" y="292608"/>
+            <a:off x="5993938" y="292608"/>
             <a:ext cx="835472" cy="566928"/>
           </a:xfrm>
           <a:prstGeom prst="rect">
@@ -14461,8 +14551,8 @@
         </p:blipFill>
         <p:spPr>
           <a:xfrm>
-            <a:off x="6869630" y="292608"/>
-            <a:ext cx="1598327" cy="566928"/>
+            <a:off x="7012291" y="292608"/>
+            <a:ext cx="1646830" cy="566928"/>
           </a:xfrm>
           <a:prstGeom prst="rect">
             <a:avLst/>
@@ -14485,8 +14575,8 @@
         </p:blipFill>
         <p:spPr>
           <a:xfrm>
-            <a:off x="8650838" y="292608"/>
-            <a:ext cx="1285036" cy="566928"/>
+            <a:off x="8842002" y="292608"/>
+            <a:ext cx="1093872" cy="566928"/>
           </a:xfrm>
           <a:prstGeom prst="rect">
             <a:avLst/>
@@ -14928,8 +15018,8 @@
         </p:nvSpPr>
         <p:spPr>
           <a:xfrm>
-            <a:off x="5686686" y="182880"/>
-            <a:ext cx="6227945" cy="786384"/>
+            <a:off x="5829346" y="182880"/>
+            <a:ext cx="6085285" cy="786384"/>
           </a:xfrm>
           <a:prstGeom prst="roundRect">
             <a:avLst>
@@ -14981,7 +15071,7 @@
         </p:blipFill>
         <p:spPr>
           <a:xfrm>
-            <a:off x="5851278" y="292608"/>
+            <a:off x="5993938" y="292608"/>
             <a:ext cx="835472" cy="566928"/>
           </a:xfrm>
           <a:prstGeom prst="rect">
@@ -15005,8 +15095,8 @@
         </p:blipFill>
         <p:spPr>
           <a:xfrm>
-            <a:off x="6869630" y="292608"/>
-            <a:ext cx="1598327" cy="566928"/>
+            <a:off x="7012291" y="292608"/>
+            <a:ext cx="1646830" cy="566928"/>
           </a:xfrm>
           <a:prstGeom prst="rect">
             <a:avLst/>
@@ -15029,8 +15119,8 @@
         </p:blipFill>
         <p:spPr>
           <a:xfrm>
-            <a:off x="8650838" y="292608"/>
-            <a:ext cx="1285036" cy="566928"/>
+            <a:off x="8842002" y="292608"/>
+            <a:ext cx="1093872" cy="566928"/>
           </a:xfrm>
           <a:prstGeom prst="rect">
             <a:avLst/>
@@ -15311,8 +15401,8 @@
         </p:nvSpPr>
         <p:spPr>
           <a:xfrm>
-            <a:off x="5686686" y="182880"/>
-            <a:ext cx="6227945" cy="786384"/>
+            <a:off x="5829346" y="182880"/>
+            <a:ext cx="6085285" cy="786384"/>
           </a:xfrm>
           <a:prstGeom prst="roundRect">
             <a:avLst>
@@ -15364,7 +15454,7 @@
         </p:blipFill>
         <p:spPr>
           <a:xfrm>
-            <a:off x="5851278" y="292608"/>
+            <a:off x="5993938" y="292608"/>
             <a:ext cx="835472" cy="566928"/>
           </a:xfrm>
           <a:prstGeom prst="rect">
@@ -15388,8 +15478,8 @@
         </p:blipFill>
         <p:spPr>
           <a:xfrm>
-            <a:off x="6869630" y="292608"/>
-            <a:ext cx="1598327" cy="566928"/>
+            <a:off x="7012291" y="292608"/>
+            <a:ext cx="1646830" cy="566928"/>
           </a:xfrm>
           <a:prstGeom prst="rect">
             <a:avLst/>
@@ -15412,8 +15502,8 @@
         </p:blipFill>
         <p:spPr>
           <a:xfrm>
-            <a:off x="8650838" y="292608"/>
-            <a:ext cx="1285036" cy="566928"/>
+            <a:off x="8842002" y="292608"/>
+            <a:ext cx="1093872" cy="566928"/>
           </a:xfrm>
           <a:prstGeom prst="rect">
             <a:avLst/>
@@ -15738,8 +15828,8 @@
         </p:nvSpPr>
         <p:spPr>
           <a:xfrm>
-            <a:off x="5686686" y="182880"/>
-            <a:ext cx="6227945" cy="786384"/>
+            <a:off x="5829346" y="182880"/>
+            <a:ext cx="6085285" cy="786384"/>
           </a:xfrm>
           <a:prstGeom prst="roundRect">
             <a:avLst>
@@ -15791,7 +15881,7 @@
         </p:blipFill>
         <p:spPr>
           <a:xfrm>
-            <a:off x="5851278" y="292608"/>
+            <a:off x="5993938" y="292608"/>
             <a:ext cx="835472" cy="566928"/>
           </a:xfrm>
           <a:prstGeom prst="rect">
@@ -15815,8 +15905,8 @@
         </p:blipFill>
         <p:spPr>
           <a:xfrm>
-            <a:off x="6869630" y="292608"/>
-            <a:ext cx="1598327" cy="566928"/>
+            <a:off x="7012291" y="292608"/>
+            <a:ext cx="1646830" cy="566928"/>
           </a:xfrm>
           <a:prstGeom prst="rect">
             <a:avLst/>
@@ -15839,8 +15929,8 @@
         </p:blipFill>
         <p:spPr>
           <a:xfrm>
-            <a:off x="8650838" y="292608"/>
-            <a:ext cx="1285036" cy="566928"/>
+            <a:off x="8842002" y="292608"/>
+            <a:ext cx="1093872" cy="566928"/>
           </a:xfrm>
           <a:prstGeom prst="rect">
             <a:avLst/>
@@ -16177,8 +16267,8 @@
         </p:nvSpPr>
         <p:spPr>
           <a:xfrm>
-            <a:off x="5686686" y="182880"/>
-            <a:ext cx="6227945" cy="786384"/>
+            <a:off x="5829346" y="182880"/>
+            <a:ext cx="6085285" cy="786384"/>
           </a:xfrm>
           <a:prstGeom prst="roundRect">
             <a:avLst>
@@ -16230,7 +16320,7 @@
         </p:blipFill>
         <p:spPr>
           <a:xfrm>
-            <a:off x="5851278" y="292608"/>
+            <a:off x="5993938" y="292608"/>
             <a:ext cx="835472" cy="566928"/>
           </a:xfrm>
           <a:prstGeom prst="rect">
@@ -16254,8 +16344,8 @@
         </p:blipFill>
         <p:spPr>
           <a:xfrm>
-            <a:off x="6869630" y="292608"/>
-            <a:ext cx="1598327" cy="566928"/>
+            <a:off x="7012291" y="292608"/>
+            <a:ext cx="1646830" cy="566928"/>
           </a:xfrm>
           <a:prstGeom prst="rect">
             <a:avLst/>
@@ -16278,8 +16368,8 @@
         </p:blipFill>
         <p:spPr>
           <a:xfrm>
-            <a:off x="8650838" y="292608"/>
-            <a:ext cx="1285036" cy="566928"/>
+            <a:off x="8842002" y="292608"/>
+            <a:ext cx="1093872" cy="566928"/>
           </a:xfrm>
           <a:prstGeom prst="rect">
             <a:avLst/>
@@ -16548,8 +16638,8 @@
         </p:nvSpPr>
         <p:spPr>
           <a:xfrm>
-            <a:off x="5686686" y="182880"/>
-            <a:ext cx="6227945" cy="786384"/>
+            <a:off x="5829346" y="182880"/>
+            <a:ext cx="6085285" cy="786384"/>
           </a:xfrm>
           <a:prstGeom prst="roundRect">
             <a:avLst>
@@ -16601,7 +16691,7 @@
         </p:blipFill>
         <p:spPr>
           <a:xfrm>
-            <a:off x="5851278" y="292608"/>
+            <a:off x="5993938" y="292608"/>
             <a:ext cx="835472" cy="566928"/>
           </a:xfrm>
           <a:prstGeom prst="rect">
@@ -16625,8 +16715,8 @@
         </p:blipFill>
         <p:spPr>
           <a:xfrm>
-            <a:off x="6869630" y="292608"/>
-            <a:ext cx="1598327" cy="566928"/>
+            <a:off x="7012291" y="292608"/>
+            <a:ext cx="1646830" cy="566928"/>
           </a:xfrm>
           <a:prstGeom prst="rect">
             <a:avLst/>
@@ -16649,8 +16739,8 @@
         </p:blipFill>
         <p:spPr>
           <a:xfrm>
-            <a:off x="8650838" y="292608"/>
-            <a:ext cx="1285036" cy="566928"/>
+            <a:off x="8842002" y="292608"/>
+            <a:ext cx="1093872" cy="566928"/>
           </a:xfrm>
           <a:prstGeom prst="rect">
             <a:avLst/>
@@ -16919,8 +17009,8 @@
         </p:nvSpPr>
         <p:spPr>
           <a:xfrm>
-            <a:off x="5686686" y="182880"/>
-            <a:ext cx="6227945" cy="786384"/>
+            <a:off x="5829346" y="182880"/>
+            <a:ext cx="6085285" cy="786384"/>
           </a:xfrm>
           <a:prstGeom prst="roundRect">
             <a:avLst>
@@ -16972,7 +17062,7 @@
         </p:blipFill>
         <p:spPr>
           <a:xfrm>
-            <a:off x="5851278" y="292608"/>
+            <a:off x="5993938" y="292608"/>
             <a:ext cx="835472" cy="566928"/>
           </a:xfrm>
           <a:prstGeom prst="rect">
@@ -16996,8 +17086,8 @@
         </p:blipFill>
         <p:spPr>
           <a:xfrm>
-            <a:off x="6869630" y="292608"/>
-            <a:ext cx="1598327" cy="566928"/>
+            <a:off x="7012291" y="292608"/>
+            <a:ext cx="1646830" cy="566928"/>
           </a:xfrm>
           <a:prstGeom prst="rect">
             <a:avLst/>
@@ -17020,8 +17110,8 @@
         </p:blipFill>
         <p:spPr>
           <a:xfrm>
-            <a:off x="8650838" y="292608"/>
-            <a:ext cx="1285036" cy="566928"/>
+            <a:off x="8842002" y="292608"/>
+            <a:ext cx="1093872" cy="566928"/>
           </a:xfrm>
           <a:prstGeom prst="rect">
             <a:avLst/>
@@ -17325,8 +17415,8 @@
         </p:nvSpPr>
         <p:spPr>
           <a:xfrm>
-            <a:off x="5686686" y="182880"/>
-            <a:ext cx="6227945" cy="786384"/>
+            <a:off x="5829346" y="182880"/>
+            <a:ext cx="6085285" cy="786384"/>
           </a:xfrm>
           <a:prstGeom prst="roundRect">
             <a:avLst>
@@ -17378,7 +17468,7 @@
         </p:blipFill>
         <p:spPr>
           <a:xfrm>
-            <a:off x="5851278" y="292608"/>
+            <a:off x="5993938" y="292608"/>
             <a:ext cx="835472" cy="566928"/>
           </a:xfrm>
           <a:prstGeom prst="rect">
@@ -17402,8 +17492,8 @@
         </p:blipFill>
         <p:spPr>
           <a:xfrm>
-            <a:off x="6869630" y="292608"/>
-            <a:ext cx="1598327" cy="566928"/>
+            <a:off x="7012291" y="292608"/>
+            <a:ext cx="1646830" cy="566928"/>
           </a:xfrm>
           <a:prstGeom prst="rect">
             <a:avLst/>
@@ -17426,8 +17516,8 @@
         </p:blipFill>
         <p:spPr>
           <a:xfrm>
-            <a:off x="8650838" y="292608"/>
-            <a:ext cx="1285036" cy="566928"/>
+            <a:off x="8842002" y="292608"/>
+            <a:ext cx="1093872" cy="566928"/>
           </a:xfrm>
           <a:prstGeom prst="rect">
             <a:avLst/>
@@ -17731,8 +17821,8 @@
         </p:nvSpPr>
         <p:spPr>
           <a:xfrm>
-            <a:off x="5686686" y="182880"/>
-            <a:ext cx="6227945" cy="786384"/>
+            <a:off x="5829346" y="182880"/>
+            <a:ext cx="6085285" cy="786384"/>
           </a:xfrm>
           <a:prstGeom prst="roundRect">
             <a:avLst>
@@ -17784,7 +17874,7 @@
         </p:blipFill>
         <p:spPr>
           <a:xfrm>
-            <a:off x="5851278" y="292608"/>
+            <a:off x="5993938" y="292608"/>
             <a:ext cx="835472" cy="566928"/>
           </a:xfrm>
           <a:prstGeom prst="rect">
@@ -17808,8 +17898,8 @@
         </p:blipFill>
         <p:spPr>
           <a:xfrm>
-            <a:off x="6869630" y="292608"/>
-            <a:ext cx="1598327" cy="566928"/>
+            <a:off x="7012291" y="292608"/>
+            <a:ext cx="1646830" cy="566928"/>
           </a:xfrm>
           <a:prstGeom prst="rect">
             <a:avLst/>
@@ -17832,8 +17922,8 @@
         </p:blipFill>
         <p:spPr>
           <a:xfrm>
-            <a:off x="8650838" y="292608"/>
-            <a:ext cx="1285036" cy="566928"/>
+            <a:off x="8842002" y="292608"/>
+            <a:ext cx="1093872" cy="566928"/>
           </a:xfrm>
           <a:prstGeom prst="rect">
             <a:avLst/>
@@ -18137,8 +18227,8 @@
         </p:nvSpPr>
         <p:spPr>
           <a:xfrm>
-            <a:off x="5686686" y="182880"/>
-            <a:ext cx="6227945" cy="786384"/>
+            <a:off x="5829346" y="182880"/>
+            <a:ext cx="6085285" cy="786384"/>
           </a:xfrm>
           <a:prstGeom prst="roundRect">
             <a:avLst>
@@ -18190,7 +18280,7 @@
         </p:blipFill>
         <p:spPr>
           <a:xfrm>
-            <a:off x="5851278" y="292608"/>
+            <a:off x="5993938" y="292608"/>
             <a:ext cx="835472" cy="566928"/>
           </a:xfrm>
           <a:prstGeom prst="rect">
@@ -18214,8 +18304,8 @@
         </p:blipFill>
         <p:spPr>
           <a:xfrm>
-            <a:off x="6869630" y="292608"/>
-            <a:ext cx="1598327" cy="566928"/>
+            <a:off x="7012291" y="292608"/>
+            <a:ext cx="1646830" cy="566928"/>
           </a:xfrm>
           <a:prstGeom prst="rect">
             <a:avLst/>
@@ -18238,8 +18328,8 @@
         </p:blipFill>
         <p:spPr>
           <a:xfrm>
-            <a:off x="8650838" y="292608"/>
-            <a:ext cx="1285036" cy="566928"/>
+            <a:off x="8842002" y="292608"/>
+            <a:ext cx="1093872" cy="566928"/>
           </a:xfrm>
           <a:prstGeom prst="rect">
             <a:avLst/>
@@ -18508,8 +18598,8 @@
         </p:nvSpPr>
         <p:spPr>
           <a:xfrm>
-            <a:off x="5686686" y="182880"/>
-            <a:ext cx="6227945" cy="786384"/>
+            <a:off x="5829346" y="182880"/>
+            <a:ext cx="6085285" cy="786384"/>
           </a:xfrm>
           <a:prstGeom prst="roundRect">
             <a:avLst>
@@ -18561,7 +18651,7 @@
         </p:blipFill>
         <p:spPr>
           <a:xfrm>
-            <a:off x="5851278" y="292608"/>
+            <a:off x="5993938" y="292608"/>
             <a:ext cx="835472" cy="566928"/>
           </a:xfrm>
           <a:prstGeom prst="rect">
@@ -18585,8 +18675,8 @@
         </p:blipFill>
         <p:spPr>
           <a:xfrm>
-            <a:off x="6869630" y="292608"/>
-            <a:ext cx="1598327" cy="566928"/>
+            <a:off x="7012291" y="292608"/>
+            <a:ext cx="1646830" cy="566928"/>
           </a:xfrm>
           <a:prstGeom prst="rect">
             <a:avLst/>
@@ -18609,8 +18699,8 @@
         </p:blipFill>
         <p:spPr>
           <a:xfrm>
-            <a:off x="8650838" y="292608"/>
-            <a:ext cx="1285036" cy="566928"/>
+            <a:off x="8842002" y="292608"/>
+            <a:ext cx="1093872" cy="566928"/>
           </a:xfrm>
           <a:prstGeom prst="rect">
             <a:avLst/>
